--- a/python_course/chapter_03_making_decisions/making_decisions.pptx
+++ b/python_course/chapter_03_making_decisions/making_decisions.pptx
@@ -15,6 +15,9 @@
     <p:sldId id="263" r:id="rId14"/>
     <p:sldId id="264" r:id="rId15"/>
     <p:sldId id="265" r:id="rId16"/>
+    <p:sldId id="266" r:id="rId17"/>
+    <p:sldId id="267" r:id="rId18"/>
+    <p:sldId id="268" r:id="rId19"/>
   </p:sldIdLst>
   <p:sldSz cx="12191695" cy="6858000" type="screen4x3"/>
   <p:notesSz cx="6858000" cy="9144000"/>
@@ -3148,8 +3151,8 @@
         </p:nvSpPr>
         <p:spPr>
           <a:xfrm>
-            <a:off x="914400" y="1828800"/>
-            <a:ext cx="10360152" cy="1371600"/>
+            <a:off x="914400" y="2286000"/>
+            <a:ext cx="10360152" cy="1097280"/>
           </a:xfrm>
           <a:prstGeom prst="rect">
             <a:avLst/>
@@ -3163,14 +3166,14 @@
           <a:lstStyle/>
           <a:p>
             <a:pPr algn="ctr">
-              <a:defRPr sz="5400" b="1">
+              <a:defRPr sz="4800" b="1">
                 <a:solidFill>
                   <a:srgbClr val="003366"/>
                 </a:solidFill>
               </a:defRPr>
             </a:pPr>
             <a:r>
-              <a:t>Chapter 3</a:t>
+              <a:t>Chapter 3: Making Decisions</a:t>
             </a:r>
           </a:p>
         </p:txBody>
@@ -3184,7 +3187,7 @@
         <p:spPr>
           <a:xfrm>
             <a:off x="914400" y="3657600"/>
-            <a:ext cx="10360152" cy="548640"/>
+            <a:ext cx="10360152" cy="731520"/>
           </a:xfrm>
           <a:prstGeom prst="rect">
             <a:avLst/>
@@ -3205,42 +3208,7 @@
               </a:defRPr>
             </a:pPr>
             <a:r>
-              <a:t>Making Decisions</a:t>
-            </a:r>
-          </a:p>
-        </p:txBody>
-      </p:sp>
-      <p:sp>
-        <p:nvSpPr>
-          <p:cNvPr id="5" name="TextBox 4"/>
-          <p:cNvSpPr txBox="1"/>
-          <p:nvPr/>
-        </p:nvSpPr>
-        <p:spPr>
-          <a:xfrm>
-            <a:off x="914400" y="4297680"/>
-            <a:ext cx="10360152" cy="548640"/>
-          </a:xfrm>
-          <a:prstGeom prst="rect">
-            <a:avLst/>
-          </a:prstGeom>
-          <a:noFill/>
-        </p:spPr>
-        <p:txBody>
-          <a:bodyPr wrap="none">
-            <a:spAutoFit/>
-          </a:bodyPr>
-          <a:lstStyle/>
-          <a:p>
-            <a:pPr algn="ctr">
-              <a:defRPr sz="2800">
-                <a:solidFill>
-                  <a:srgbClr val="4682B4"/>
-                </a:solidFill>
-              </a:defRPr>
-            </a:pPr>
-            <a:r>
-              <a:t>Teaching Programs to Think</a:t>
+              <a:t>Conditional Statements and Boolean Logic</a:t>
             </a:r>
           </a:p>
         </p:txBody>
@@ -3254,172 +3222,6 @@
 </file>
 
 <file path=ppt/slides/slide10.xml><?xml version="1.0" encoding="utf-8"?>
-<p:sld xmlns:a="http://schemas.openxmlformats.org/drawingml/2006/main" xmlns:p="http://schemas.openxmlformats.org/presentationml/2006/main" xmlns:r="http://schemas.openxmlformats.org/officeDocument/2006/relationships">
-  <p:cSld>
-    <p:spTree>
-      <p:nvGrpSpPr>
-        <p:cNvPr id="1" name=""/>
-        <p:cNvGrpSpPr/>
-        <p:nvPr/>
-      </p:nvGrpSpPr>
-      <p:grpSpPr/>
-      <p:sp>
-        <p:nvSpPr>
-          <p:cNvPr id="2" name="Rectangle 1"/>
-          <p:cNvSpPr/>
-          <p:nvPr/>
-        </p:nvSpPr>
-        <p:spPr>
-          <a:xfrm>
-            <a:off x="0" y="0"/>
-            <a:ext cx="12191695" cy="6858000"/>
-          </a:xfrm>
-          <a:prstGeom prst="rect">
-            <a:avLst/>
-          </a:prstGeom>
-          <a:solidFill>
-            <a:srgbClr val="F0F8FF"/>
-          </a:solidFill>
-          <a:ln>
-            <a:noFill/>
-          </a:ln>
-        </p:spPr>
-        <p:style>
-          <a:lnRef idx="1">
-            <a:schemeClr val="accent1"/>
-          </a:lnRef>
-          <a:fillRef idx="3">
-            <a:schemeClr val="accent1"/>
-          </a:fillRef>
-          <a:effectRef idx="2">
-            <a:schemeClr val="accent1"/>
-          </a:effectRef>
-          <a:fontRef idx="minor">
-            <a:schemeClr val="lt1"/>
-          </a:fontRef>
-        </p:style>
-        <p:txBody>
-          <a:bodyPr rtlCol="0" anchor="ctr"/>
-          <a:lstStyle/>
-          <a:p>
-            <a:pPr algn="ctr"/>
-          </a:p>
-        </p:txBody>
-      </p:sp>
-      <p:sp>
-        <p:nvSpPr>
-          <p:cNvPr id="3" name="TextBox 2"/>
-          <p:cNvSpPr txBox="1"/>
-          <p:nvPr/>
-        </p:nvSpPr>
-        <p:spPr>
-          <a:xfrm>
-            <a:off x="914400" y="1828800"/>
-            <a:ext cx="10360152" cy="1371600"/>
-          </a:xfrm>
-          <a:prstGeom prst="rect">
-            <a:avLst/>
-          </a:prstGeom>
-          <a:noFill/>
-        </p:spPr>
-        <p:txBody>
-          <a:bodyPr wrap="none">
-            <a:spAutoFit/>
-          </a:bodyPr>
-          <a:lstStyle/>
-          <a:p>
-            <a:pPr algn="ctr">
-              <a:defRPr sz="5400" b="1">
-                <a:solidFill>
-                  <a:srgbClr val="003366"/>
-                </a:solidFill>
-              </a:defRPr>
-            </a:pPr>
-            <a:r>
-              <a:t>Time to Decide!</a:t>
-            </a:r>
-          </a:p>
-        </p:txBody>
-      </p:sp>
-      <p:sp>
-        <p:nvSpPr>
-          <p:cNvPr id="4" name="TextBox 3"/>
-          <p:cNvSpPr txBox="1"/>
-          <p:nvPr/>
-        </p:nvSpPr>
-        <p:spPr>
-          <a:xfrm>
-            <a:off x="914400" y="3657600"/>
-            <a:ext cx="10360152" cy="548640"/>
-          </a:xfrm>
-          <a:prstGeom prst="rect">
-            <a:avLst/>
-          </a:prstGeom>
-          <a:noFill/>
-        </p:spPr>
-        <p:txBody>
-          <a:bodyPr wrap="none">
-            <a:spAutoFit/>
-          </a:bodyPr>
-          <a:lstStyle/>
-          <a:p>
-            <a:pPr algn="ctr">
-              <a:defRPr sz="2800">
-                <a:solidFill>
-                  <a:srgbClr val="4682B4"/>
-                </a:solidFill>
-              </a:defRPr>
-            </a:pPr>
-            <a:r>
-              <a:t>Open the practice notebook and start making smart programs</a:t>
-            </a:r>
-          </a:p>
-        </p:txBody>
-      </p:sp>
-      <p:sp>
-        <p:nvSpPr>
-          <p:cNvPr id="5" name="TextBox 4"/>
-          <p:cNvSpPr txBox="1"/>
-          <p:nvPr/>
-        </p:nvSpPr>
-        <p:spPr>
-          <a:xfrm>
-            <a:off x="914400" y="4297680"/>
-            <a:ext cx="10360152" cy="548640"/>
-          </a:xfrm>
-          <a:prstGeom prst="rect">
-            <a:avLst/>
-          </a:prstGeom>
-          <a:noFill/>
-        </p:spPr>
-        <p:txBody>
-          <a:bodyPr wrap="none">
-            <a:spAutoFit/>
-          </a:bodyPr>
-          <a:lstStyle/>
-          <a:p>
-            <a:pPr algn="ctr">
-              <a:defRPr sz="2800">
-                <a:solidFill>
-                  <a:srgbClr val="4682B4"/>
-                </a:solidFill>
-              </a:defRPr>
-            </a:pPr>
-            <a:r>
-              <a:t>Your programs are about to get much smarter! 🧠</a:t>
-            </a:r>
-          </a:p>
-        </p:txBody>
-      </p:sp>
-    </p:spTree>
-  </p:cSld>
-  <p:clrMapOvr>
-    <a:masterClrMapping/>
-  </p:clrMapOvr>
-</p:sld>
-</file>
-
-<file path=ppt/slides/slide2.xml><?xml version="1.0" encoding="utf-8"?>
 <p:sld xmlns:a="http://schemas.openxmlformats.org/drawingml/2006/main" xmlns:p="http://schemas.openxmlformats.org/presentationml/2006/main" xmlns:r="http://schemas.openxmlformats.org/officeDocument/2006/relationships">
   <p:cSld>
     <p:spTree>
@@ -3523,8 +3325,8 @@
         </p:nvSpPr>
         <p:spPr>
           <a:xfrm>
-            <a:off x="457200" y="365760"/>
-            <a:ext cx="10972800" cy="731520"/>
+            <a:off x="457200" y="320040"/>
+            <a:ext cx="10972800" cy="640080"/>
           </a:xfrm>
           <a:prstGeom prst="rect">
             <a:avLst/>
@@ -3538,71 +3340,28 @@
           <a:lstStyle/>
           <a:p>
             <a:pPr>
-              <a:defRPr sz="4000" b="1">
+              <a:defRPr sz="3600" b="1">
                 <a:solidFill>
                   <a:srgbClr val="003366"/>
                 </a:solidFill>
               </a:defRPr>
             </a:pPr>
             <a:r>
-              <a:t>Programs Need to Make Choices 🤔</a:t>
-            </a:r>
-          </a:p>
-        </p:txBody>
-      </p:sp>
-      <p:sp>
-        <p:nvSpPr>
-          <p:cNvPr id="5" name="Rectangle 4"/>
-          <p:cNvSpPr/>
+              <a:t>Combining Logical Operators</a:t>
+            </a:r>
+          </a:p>
+        </p:txBody>
+      </p:sp>
+      <p:sp>
+        <p:nvSpPr>
+          <p:cNvPr id="5" name="TextBox 4"/>
+          <p:cNvSpPr txBox="1"/>
           <p:nvPr/>
         </p:nvSpPr>
         <p:spPr>
           <a:xfrm>
-            <a:off x="457200" y="1005840"/>
-            <a:ext cx="1828800" cy="45720"/>
-          </a:xfrm>
-          <a:prstGeom prst="rect">
-            <a:avLst/>
-          </a:prstGeom>
-          <a:solidFill>
-            <a:srgbClr val="0066CC"/>
-          </a:solidFill>
-          <a:ln>
-            <a:noFill/>
-          </a:ln>
-        </p:spPr>
-        <p:style>
-          <a:lnRef idx="1">
-            <a:schemeClr val="accent1"/>
-          </a:lnRef>
-          <a:fillRef idx="3">
-            <a:schemeClr val="accent1"/>
-          </a:fillRef>
-          <a:effectRef idx="2">
-            <a:schemeClr val="accent1"/>
-          </a:effectRef>
-          <a:fontRef idx="minor">
-            <a:schemeClr val="lt1"/>
-          </a:fontRef>
-        </p:style>
-        <p:txBody>
-          <a:bodyPr rtlCol="0" anchor="ctr"/>
-          <a:lstStyle/>
-          <a:p>
-            <a:pPr algn="ctr"/>
-          </a:p>
-        </p:txBody>
-      </p:sp>
-      <p:sp>
-        <p:nvSpPr>
-          <p:cNvPr id="6" name="TextBox 5"/>
-          <p:cNvSpPr txBox="1"/>
-          <p:nvPr/>
-        </p:nvSpPr>
-        <p:spPr>
-          <a:xfrm>
-            <a:off x="640080" y="1371600"/>
-            <a:ext cx="10789920" cy="4572000"/>
+            <a:off x="640080" y="1188720"/>
+            <a:ext cx="10789920" cy="5303520"/>
           </a:xfrm>
           <a:prstGeom prst="rect">
             <a:avLst/>
@@ -3617,91 +3376,301 @@
           <a:p>
             <a:pPr>
               <a:spcAft>
-                <a:spcPts val="800"/>
-              </a:spcAft>
-              <a:defRPr sz="2000" b="1">
-                <a:solidFill>
-                  <a:srgbClr val="333333"/>
-                </a:solidFill>
-              </a:defRPr>
-            </a:pPr>
-            <a:r>
-              <a:t>In real life, we make decisions every day:</a:t>
-            </a:r>
-          </a:p>
-          <a:p>
-            <a:pPr>
-              <a:spcAft>
-                <a:spcPts val="800"/>
-              </a:spcAft>
-              <a:defRPr sz="2000" b="1">
-                <a:solidFill>
-                  <a:srgbClr val="333333"/>
-                </a:solidFill>
-              </a:defRPr>
-            </a:pPr>
-            <a:r>
-              <a:t>☀️ If it's sunny → Go outside</a:t>
-            </a:r>
-          </a:p>
-          <a:p>
-            <a:pPr>
-              <a:spcAft>
-                <a:spcPts val="800"/>
-              </a:spcAft>
-              <a:defRPr sz="2000" b="1">
-                <a:solidFill>
-                  <a:srgbClr val="333333"/>
-                </a:solidFill>
-              </a:defRPr>
-            </a:pPr>
-            <a:r>
-              <a:t>🌧️ If it's raining → Stay inside</a:t>
-            </a:r>
-          </a:p>
-          <a:p>
-            <a:pPr>
-              <a:spcAft>
-                <a:spcPts val="800"/>
-              </a:spcAft>
-              <a:defRPr sz="2000" b="1">
-                <a:solidFill>
-                  <a:srgbClr val="333333"/>
-                </a:solidFill>
-              </a:defRPr>
-            </a:pPr>
-            <a:r>
-              <a:t>🎂 If age ≥ 18 → Adult</a:t>
-            </a:r>
-          </a:p>
-          <a:p>
-            <a:pPr>
-              <a:spcAft>
-                <a:spcPts val="800"/>
-              </a:spcAft>
-              <a:defRPr sz="2000" b="1">
-                <a:solidFill>
-                  <a:srgbClr val="333333"/>
-                </a:solidFill>
-              </a:defRPr>
-            </a:pPr>
-            <a:r>
-              <a:t>💰 If price &gt; budget → Can't buy</a:t>
-            </a:r>
-          </a:p>
-          <a:p>
-            <a:pPr>
-              <a:spcAft>
-                <a:spcPts val="800"/>
-              </a:spcAft>
-              <a:defRPr sz="2000" b="1">
-                <a:solidFill>
-                  <a:srgbClr val="333333"/>
-                </a:solidFill>
-              </a:defRPr>
-            </a:pPr>
-            <a:r>
-              <a:t>Programs need to make similar decisions!</a:t>
+                <a:spcPts val="600"/>
+              </a:spcAft>
+              <a:defRPr b="1" sz="2000">
+                <a:solidFill>
+                  <a:srgbClr val="333333"/>
+                </a:solidFill>
+              </a:defRPr>
+            </a:pPr>
+            <a:r>
+              <a:t>Using Multiple Operators:</a:t>
+            </a:r>
+          </a:p>
+          <a:p>
+            <a:pPr>
+              <a:spcAft>
+                <a:spcPts val="600"/>
+              </a:spcAft>
+              <a:defRPr b="1" sz="2000">
+                <a:solidFill>
+                  <a:srgbClr val="333333"/>
+                </a:solidFill>
+              </a:defRPr>
+            </a:pPr>
+            <a:r>
+              <a:t>Example 1: Age and Student Status</a:t>
+            </a:r>
+          </a:p>
+          <a:p>
+            <a:pPr>
+              <a:spcAft>
+                <a:spcPts val="600"/>
+              </a:spcAft>
+              <a:defRPr sz="1600">
+                <a:solidFill>
+                  <a:srgbClr val="333333"/>
+                </a:solidFill>
+              </a:defRPr>
+            </a:pPr>
+            <a:r>
+              <a:t>age = 20</a:t>
+            </a:r>
+          </a:p>
+          <a:p>
+            <a:pPr>
+              <a:spcAft>
+                <a:spcPts val="600"/>
+              </a:spcAft>
+              <a:defRPr sz="1600">
+                <a:solidFill>
+                  <a:srgbClr val="333333"/>
+                </a:solidFill>
+              </a:defRPr>
+            </a:pPr>
+            <a:r>
+              <a:t>is_student = True</a:t>
+            </a:r>
+          </a:p>
+          <a:p>
+            <a:pPr>
+              <a:spcAft>
+                <a:spcPts val="600"/>
+              </a:spcAft>
+              <a:defRPr b="1" sz="2000">
+                <a:solidFill>
+                  <a:srgbClr val="333333"/>
+                </a:solidFill>
+              </a:defRPr>
+            </a:pPr>
+            <a:r>
+              <a:t>if age &lt; 25 and is_student:</a:t>
+            </a:r>
+          </a:p>
+          <a:p>
+            <a:pPr>
+              <a:spcAft>
+                <a:spcPts val="600"/>
+              </a:spcAft>
+              <a:defRPr sz="1600">
+                <a:solidFill>
+                  <a:srgbClr val="333333"/>
+                </a:solidFill>
+              </a:defRPr>
+            </a:pPr>
+            <a:r>
+              <a:t>    print("Student discount")</a:t>
+            </a:r>
+          </a:p>
+          <a:p>
+            <a:pPr>
+              <a:spcAft>
+                <a:spcPts val="600"/>
+              </a:spcAft>
+              <a:defRPr b="1" sz="2000">
+                <a:solidFill>
+                  <a:srgbClr val="333333"/>
+                </a:solidFill>
+              </a:defRPr>
+            </a:pPr>
+            <a:r>
+              <a:t>Example 2: Complex Eligibility</a:t>
+            </a:r>
+          </a:p>
+          <a:p>
+            <a:pPr>
+              <a:spcAft>
+                <a:spcPts val="600"/>
+              </a:spcAft>
+              <a:defRPr b="1" sz="2000">
+                <a:solidFill>
+                  <a:srgbClr val="333333"/>
+                </a:solidFill>
+              </a:defRPr>
+            </a:pPr>
+            <a:r>
+              <a:t>if (age &gt;= 18 and age &lt;= 65) or has_permit:</a:t>
+            </a:r>
+          </a:p>
+          <a:p>
+            <a:pPr>
+              <a:spcAft>
+                <a:spcPts val="600"/>
+              </a:spcAft>
+              <a:defRPr sz="1600">
+                <a:solidFill>
+                  <a:srgbClr val="333333"/>
+                </a:solidFill>
+              </a:defRPr>
+            </a:pPr>
+            <a:r>
+              <a:t>    print("Can apply")</a:t>
+            </a:r>
+          </a:p>
+          <a:p>
+            <a:pPr>
+              <a:spcAft>
+                <a:spcPts val="600"/>
+              </a:spcAft>
+              <a:defRPr b="1" sz="2000">
+                <a:solidFill>
+                  <a:srgbClr val="333333"/>
+                </a:solidFill>
+              </a:defRPr>
+            </a:pPr>
+            <a:r>
+              <a:t>Precedence Rules:</a:t>
+            </a:r>
+          </a:p>
+          <a:p>
+            <a:pPr>
+              <a:spcAft>
+                <a:spcPts val="600"/>
+              </a:spcAft>
+              <a:defRPr sz="1600">
+                <a:solidFill>
+                  <a:srgbClr val="333333"/>
+                </a:solidFill>
+              </a:defRPr>
+            </a:pPr>
+            <a:r>
+              <a:t>1. not (highest)</a:t>
+            </a:r>
+          </a:p>
+          <a:p>
+            <a:pPr>
+              <a:spcAft>
+                <a:spcPts val="600"/>
+              </a:spcAft>
+              <a:defRPr sz="1600">
+                <a:solidFill>
+                  <a:srgbClr val="333333"/>
+                </a:solidFill>
+              </a:defRPr>
+            </a:pPr>
+            <a:r>
+              <a:t>2. and</a:t>
+            </a:r>
+          </a:p>
+          <a:p>
+            <a:pPr>
+              <a:spcAft>
+                <a:spcPts val="600"/>
+              </a:spcAft>
+              <a:defRPr sz="1600">
+                <a:solidFill>
+                  <a:srgbClr val="333333"/>
+                </a:solidFill>
+              </a:defRPr>
+            </a:pPr>
+            <a:r>
+              <a:t>3. or (lowest)</a:t>
+            </a:r>
+          </a:p>
+          <a:p>
+            <a:pPr>
+              <a:spcAft>
+                <a:spcPts val="600"/>
+              </a:spcAft>
+              <a:defRPr b="1" sz="2000">
+                <a:solidFill>
+                  <a:srgbClr val="333333"/>
+                </a:solidFill>
+              </a:defRPr>
+            </a:pPr>
+            <a:r>
+              <a:t>Use Parentheses for Clarity:</a:t>
+            </a:r>
+          </a:p>
+          <a:p>
+            <a:pPr>
+              <a:spcAft>
+                <a:spcPts val="600"/>
+              </a:spcAft>
+              <a:defRPr b="1" sz="2000">
+                <a:solidFill>
+                  <a:srgbClr val="333333"/>
+                </a:solidFill>
+              </a:defRPr>
+            </a:pPr>
+            <a:r>
+              <a:t>if (age &gt;= 18 and has_license) or has_permit:</a:t>
+            </a:r>
+          </a:p>
+          <a:p>
+            <a:pPr>
+              <a:spcAft>
+                <a:spcPts val="600"/>
+              </a:spcAft>
+              <a:defRPr sz="1600">
+                <a:solidFill>
+                  <a:srgbClr val="333333"/>
+                </a:solidFill>
+              </a:defRPr>
+            </a:pPr>
+            <a:r>
+              <a:t>    # Clear intention</a:t>
+            </a:r>
+          </a:p>
+          <a:p>
+            <a:pPr>
+              <a:spcAft>
+                <a:spcPts val="600"/>
+              </a:spcAft>
+              <a:defRPr b="1" sz="2000">
+                <a:solidFill>
+                  <a:srgbClr val="333333"/>
+                </a:solidFill>
+              </a:defRPr>
+            </a:pPr>
+            <a:r>
+              <a:t>Best Practices:</a:t>
+            </a:r>
+          </a:p>
+          <a:p>
+            <a:pPr lvl="1">
+              <a:spcAft>
+                <a:spcPts val="400"/>
+              </a:spcAft>
+              <a:defRPr sz="1600">
+                <a:solidFill>
+                  <a:srgbClr val="333333"/>
+                </a:solidFill>
+              </a:defRPr>
+            </a:pPr>
+            <a:r>
+              <a:t>• Use parentheses for readability</a:t>
+            </a:r>
+          </a:p>
+          <a:p>
+            <a:pPr lvl="1">
+              <a:spcAft>
+                <a:spcPts val="400"/>
+              </a:spcAft>
+              <a:defRPr sz="1600">
+                <a:solidFill>
+                  <a:srgbClr val="333333"/>
+                </a:solidFill>
+              </a:defRPr>
+            </a:pPr>
+            <a:r>
+              <a:t>• Break complex conditions into variables</a:t>
+            </a:r>
+          </a:p>
+          <a:p>
+            <a:pPr lvl="1">
+              <a:spcAft>
+                <a:spcPts val="400"/>
+              </a:spcAft>
+              <a:defRPr sz="1600">
+                <a:solidFill>
+                  <a:srgbClr val="333333"/>
+                </a:solidFill>
+              </a:defRPr>
+            </a:pPr>
+            <a:r>
+              <a:t>• Comment complex logic</a:t>
             </a:r>
           </a:p>
         </p:txBody>
@@ -3714,7 +3683,7 @@
 </p:sld>
 </file>
 
-<file path=ppt/slides/slide3.xml><?xml version="1.0" encoding="utf-8"?>
+<file path=ppt/slides/slide11.xml><?xml version="1.0" encoding="utf-8"?>
 <p:sld xmlns:a="http://schemas.openxmlformats.org/drawingml/2006/main" xmlns:p="http://schemas.openxmlformats.org/presentationml/2006/main" xmlns:r="http://schemas.openxmlformats.org/officeDocument/2006/relationships">
   <p:cSld>
     <p:spTree>
@@ -3818,8 +3787,8 @@
         </p:nvSpPr>
         <p:spPr>
           <a:xfrm>
-            <a:off x="457200" y="365760"/>
-            <a:ext cx="10972800" cy="731520"/>
+            <a:off x="457200" y="320040"/>
+            <a:ext cx="10972800" cy="640080"/>
           </a:xfrm>
           <a:prstGeom prst="rect">
             <a:avLst/>
@@ -3833,71 +3802,28 @@
           <a:lstStyle/>
           <a:p>
             <a:pPr>
-              <a:defRPr sz="4000" b="1">
+              <a:defRPr sz="3600" b="1">
                 <a:solidFill>
                   <a:srgbClr val="003366"/>
                 </a:solidFill>
               </a:defRPr>
             </a:pPr>
             <a:r>
-              <a:t>Boolean Values: True or False ✓✗</a:t>
-            </a:r>
-          </a:p>
-        </p:txBody>
-      </p:sp>
-      <p:sp>
-        <p:nvSpPr>
-          <p:cNvPr id="5" name="Rectangle 4"/>
-          <p:cNvSpPr/>
+              <a:t>Nested if Statements</a:t>
+            </a:r>
+          </a:p>
+        </p:txBody>
+      </p:sp>
+      <p:sp>
+        <p:nvSpPr>
+          <p:cNvPr id="5" name="TextBox 4"/>
+          <p:cNvSpPr txBox="1"/>
           <p:nvPr/>
         </p:nvSpPr>
         <p:spPr>
           <a:xfrm>
-            <a:off x="457200" y="1005840"/>
-            <a:ext cx="1828800" cy="45720"/>
-          </a:xfrm>
-          <a:prstGeom prst="rect">
-            <a:avLst/>
-          </a:prstGeom>
-          <a:solidFill>
-            <a:srgbClr val="0066CC"/>
-          </a:solidFill>
-          <a:ln>
-            <a:noFill/>
-          </a:ln>
-        </p:spPr>
-        <p:style>
-          <a:lnRef idx="1">
-            <a:schemeClr val="accent1"/>
-          </a:lnRef>
-          <a:fillRef idx="3">
-            <a:schemeClr val="accent1"/>
-          </a:fillRef>
-          <a:effectRef idx="2">
-            <a:schemeClr val="accent1"/>
-          </a:effectRef>
-          <a:fontRef idx="minor">
-            <a:schemeClr val="lt1"/>
-          </a:fontRef>
-        </p:style>
-        <p:txBody>
-          <a:bodyPr rtlCol="0" anchor="ctr"/>
-          <a:lstStyle/>
-          <a:p>
-            <a:pPr algn="ctr"/>
-          </a:p>
-        </p:txBody>
-      </p:sp>
-      <p:sp>
-        <p:nvSpPr>
-          <p:cNvPr id="6" name="TextBox 5"/>
-          <p:cNvSpPr txBox="1"/>
-          <p:nvPr/>
-        </p:nvSpPr>
-        <p:spPr>
-          <a:xfrm>
-            <a:off x="640080" y="1371600"/>
-            <a:ext cx="10789920" cy="4572000"/>
+            <a:off x="640080" y="1188720"/>
+            <a:ext cx="10789920" cy="5303520"/>
           </a:xfrm>
           <a:prstGeom prst="rect">
             <a:avLst/>
@@ -3912,91 +3838,391 @@
           <a:p>
             <a:pPr>
               <a:spcAft>
-                <a:spcPts val="800"/>
-              </a:spcAft>
-              <a:defRPr sz="2000" b="1">
-                <a:solidFill>
-                  <a:srgbClr val="333333"/>
-                </a:solidFill>
-              </a:defRPr>
-            </a:pPr>
-            <a:r>
-              <a:t>Boolean is a data type with only two possible values</a:t>
-            </a:r>
-          </a:p>
-          <a:p>
-            <a:pPr>
-              <a:spcAft>
-                <a:spcPts val="800"/>
-              </a:spcAft>
-              <a:defRPr sz="2000" b="1">
-                <a:solidFill>
-                  <a:srgbClr val="333333"/>
-                </a:solidFill>
-              </a:defRPr>
-            </a:pPr>
-            <a:r>
-              <a:t>True</a:t>
-            </a:r>
-          </a:p>
-          <a:p>
-            <a:pPr>
-              <a:spcAft>
-                <a:spcPts val="800"/>
-              </a:spcAft>
-              <a:defRPr sz="2000" b="1">
-                <a:solidFill>
-                  <a:srgbClr val="333333"/>
-                </a:solidFill>
-              </a:defRPr>
-            </a:pPr>
-            <a:r>
-              <a:t>Yes, Correct, 1</a:t>
-            </a:r>
-          </a:p>
-          <a:p>
-            <a:pPr>
-              <a:spcAft>
-                <a:spcPts val="800"/>
-              </a:spcAft>
-              <a:defRPr sz="2000" b="1">
-                <a:solidFill>
-                  <a:srgbClr val="333333"/>
-                </a:solidFill>
-              </a:defRPr>
-            </a:pPr>
-            <a:r>
-              <a:t>False</a:t>
-            </a:r>
-          </a:p>
-          <a:p>
-            <a:pPr>
-              <a:spcAft>
-                <a:spcPts val="800"/>
-              </a:spcAft>
-              <a:defRPr sz="2000" b="1">
-                <a:solidFill>
-                  <a:srgbClr val="333333"/>
-                </a:solidFill>
-              </a:defRPr>
-            </a:pPr>
-            <a:r>
-              <a:t>No, Incorrect, 0</a:t>
-            </a:r>
-          </a:p>
-          <a:p>
-            <a:pPr>
-              <a:spcAft>
-                <a:spcPts val="800"/>
-              </a:spcAft>
-              <a:defRPr sz="2000" b="1">
-                <a:solidFill>
-                  <a:srgbClr val="333333"/>
-                </a:solidFill>
-              </a:defRPr>
-            </a:pPr>
-            <a:r>
-              <a:t>Examples:</a:t>
+                <a:spcPts val="600"/>
+              </a:spcAft>
+              <a:defRPr b="1" sz="2000">
+                <a:solidFill>
+                  <a:srgbClr val="333333"/>
+                </a:solidFill>
+              </a:defRPr>
+            </a:pPr>
+            <a:r>
+              <a:t>if Statements Inside if Statements:</a:t>
+            </a:r>
+          </a:p>
+          <a:p>
+            <a:pPr>
+              <a:spcAft>
+                <a:spcPts val="600"/>
+              </a:spcAft>
+              <a:defRPr b="1" sz="2000">
+                <a:solidFill>
+                  <a:srgbClr val="333333"/>
+                </a:solidFill>
+              </a:defRPr>
+            </a:pPr>
+            <a:r>
+              <a:t>Basic Structure:</a:t>
+            </a:r>
+          </a:p>
+          <a:p>
+            <a:pPr>
+              <a:spcAft>
+                <a:spcPts val="600"/>
+              </a:spcAft>
+              <a:defRPr b="1" sz="2000">
+                <a:solidFill>
+                  <a:srgbClr val="333333"/>
+                </a:solidFill>
+              </a:defRPr>
+            </a:pPr>
+            <a:r>
+              <a:t>if condition1:</a:t>
+            </a:r>
+          </a:p>
+          <a:p>
+            <a:pPr>
+              <a:spcAft>
+                <a:spcPts val="600"/>
+              </a:spcAft>
+              <a:defRPr sz="1600">
+                <a:solidFill>
+                  <a:srgbClr val="333333"/>
+                </a:solidFill>
+              </a:defRPr>
+            </a:pPr>
+            <a:r>
+              <a:t>    if condition2:</a:t>
+            </a:r>
+          </a:p>
+          <a:p>
+            <a:pPr>
+              <a:spcAft>
+                <a:spcPts val="600"/>
+              </a:spcAft>
+              <a:defRPr sz="1600">
+                <a:solidFill>
+                  <a:srgbClr val="333333"/>
+                </a:solidFill>
+              </a:defRPr>
+            </a:pPr>
+            <a:r>
+              <a:t>        # code</a:t>
+            </a:r>
+          </a:p>
+          <a:p>
+            <a:pPr>
+              <a:spcAft>
+                <a:spcPts val="600"/>
+              </a:spcAft>
+              <a:defRPr b="1" sz="2000">
+                <a:solidFill>
+                  <a:srgbClr val="333333"/>
+                </a:solidFill>
+              </a:defRPr>
+            </a:pPr>
+            <a:r>
+              <a:t>Example:</a:t>
+            </a:r>
+          </a:p>
+          <a:p>
+            <a:pPr>
+              <a:spcAft>
+                <a:spcPts val="600"/>
+              </a:spcAft>
+              <a:defRPr sz="1600">
+                <a:solidFill>
+                  <a:srgbClr val="333333"/>
+                </a:solidFill>
+              </a:defRPr>
+            </a:pPr>
+            <a:r>
+              <a:t>age = 20</a:t>
+            </a:r>
+          </a:p>
+          <a:p>
+            <a:pPr>
+              <a:spcAft>
+                <a:spcPts val="600"/>
+              </a:spcAft>
+              <a:defRPr sz="1600">
+                <a:solidFill>
+                  <a:srgbClr val="333333"/>
+                </a:solidFill>
+              </a:defRPr>
+            </a:pPr>
+            <a:r>
+              <a:t>has_ticket = True</a:t>
+            </a:r>
+          </a:p>
+          <a:p>
+            <a:pPr>
+              <a:spcAft>
+                <a:spcPts val="600"/>
+              </a:spcAft>
+              <a:defRPr b="1" sz="2000">
+                <a:solidFill>
+                  <a:srgbClr val="333333"/>
+                </a:solidFill>
+              </a:defRPr>
+            </a:pPr>
+            <a:r>
+              <a:t>if age &gt;= 18:</a:t>
+            </a:r>
+          </a:p>
+          <a:p>
+            <a:pPr>
+              <a:spcAft>
+                <a:spcPts val="600"/>
+              </a:spcAft>
+              <a:defRPr sz="1600">
+                <a:solidFill>
+                  <a:srgbClr val="333333"/>
+                </a:solidFill>
+              </a:defRPr>
+            </a:pPr>
+            <a:r>
+              <a:t>    if has_ticket:</a:t>
+            </a:r>
+          </a:p>
+          <a:p>
+            <a:pPr>
+              <a:spcAft>
+                <a:spcPts val="600"/>
+              </a:spcAft>
+              <a:defRPr sz="1600">
+                <a:solidFill>
+                  <a:srgbClr val="333333"/>
+                </a:solidFill>
+              </a:defRPr>
+            </a:pPr>
+            <a:r>
+              <a:t>        print("Enjoy the show!")</a:t>
+            </a:r>
+          </a:p>
+          <a:p>
+            <a:pPr>
+              <a:spcAft>
+                <a:spcPts val="600"/>
+              </a:spcAft>
+              <a:defRPr sz="1600">
+                <a:solidFill>
+                  <a:srgbClr val="333333"/>
+                </a:solidFill>
+              </a:defRPr>
+            </a:pPr>
+            <a:r>
+              <a:t>    else:</a:t>
+            </a:r>
+          </a:p>
+          <a:p>
+            <a:pPr>
+              <a:spcAft>
+                <a:spcPts val="600"/>
+              </a:spcAft>
+              <a:defRPr sz="1600">
+                <a:solidFill>
+                  <a:srgbClr val="333333"/>
+                </a:solidFill>
+              </a:defRPr>
+            </a:pPr>
+            <a:r>
+              <a:t>        print("Please buy a ticket")</a:t>
+            </a:r>
+          </a:p>
+          <a:p>
+            <a:pPr>
+              <a:spcAft>
+                <a:spcPts val="600"/>
+              </a:spcAft>
+              <a:defRPr b="1" sz="2000">
+                <a:solidFill>
+                  <a:srgbClr val="333333"/>
+                </a:solidFill>
+              </a:defRPr>
+            </a:pPr>
+            <a:r>
+              <a:t>else:</a:t>
+            </a:r>
+          </a:p>
+          <a:p>
+            <a:pPr>
+              <a:spcAft>
+                <a:spcPts val="600"/>
+              </a:spcAft>
+              <a:defRPr sz="1600">
+                <a:solidFill>
+                  <a:srgbClr val="333333"/>
+                </a:solidFill>
+              </a:defRPr>
+            </a:pPr>
+            <a:r>
+              <a:t>    print("Too young")</a:t>
+            </a:r>
+          </a:p>
+          <a:p>
+            <a:pPr>
+              <a:spcAft>
+                <a:spcPts val="600"/>
+              </a:spcAft>
+              <a:defRPr b="1" sz="2000">
+                <a:solidFill>
+                  <a:srgbClr val="333333"/>
+                </a:solidFill>
+              </a:defRPr>
+            </a:pPr>
+            <a:r>
+              <a:t>When to Use:</a:t>
+            </a:r>
+          </a:p>
+          <a:p>
+            <a:pPr lvl="1">
+              <a:spcAft>
+                <a:spcPts val="400"/>
+              </a:spcAft>
+              <a:defRPr sz="1600">
+                <a:solidFill>
+                  <a:srgbClr val="333333"/>
+                </a:solidFill>
+              </a:defRPr>
+            </a:pPr>
+            <a:r>
+              <a:t>• Sequential decisions</a:t>
+            </a:r>
+          </a:p>
+          <a:p>
+            <a:pPr lvl="1">
+              <a:spcAft>
+                <a:spcPts val="400"/>
+              </a:spcAft>
+              <a:defRPr sz="1600">
+                <a:solidFill>
+                  <a:srgbClr val="333333"/>
+                </a:solidFill>
+              </a:defRPr>
+            </a:pPr>
+            <a:r>
+              <a:t>• Dependent conditions</a:t>
+            </a:r>
+          </a:p>
+          <a:p>
+            <a:pPr lvl="1">
+              <a:spcAft>
+                <a:spcPts val="400"/>
+              </a:spcAft>
+              <a:defRPr sz="1600">
+                <a:solidFill>
+                  <a:srgbClr val="333333"/>
+                </a:solidFill>
+              </a:defRPr>
+            </a:pPr>
+            <a:r>
+              <a:t>• Multi-level validation</a:t>
+            </a:r>
+          </a:p>
+          <a:p>
+            <a:pPr>
+              <a:spcAft>
+                <a:spcPts val="600"/>
+              </a:spcAft>
+              <a:defRPr b="1" sz="2000">
+                <a:solidFill>
+                  <a:srgbClr val="333333"/>
+                </a:solidFill>
+              </a:defRPr>
+            </a:pPr>
+            <a:r>
+              <a:t>Alternative: Use and</a:t>
+            </a:r>
+          </a:p>
+          <a:p>
+            <a:pPr>
+              <a:spcAft>
+                <a:spcPts val="600"/>
+              </a:spcAft>
+              <a:defRPr b="1" sz="2000">
+                <a:solidFill>
+                  <a:srgbClr val="333333"/>
+                </a:solidFill>
+              </a:defRPr>
+            </a:pPr>
+            <a:r>
+              <a:t>if age &gt;= 18 and has_ticket:</a:t>
+            </a:r>
+          </a:p>
+          <a:p>
+            <a:pPr>
+              <a:spcAft>
+                <a:spcPts val="600"/>
+              </a:spcAft>
+              <a:defRPr sz="1600">
+                <a:solidFill>
+                  <a:srgbClr val="333333"/>
+                </a:solidFill>
+              </a:defRPr>
+            </a:pPr>
+            <a:r>
+              <a:t>    print("Enjoy the show!")</a:t>
+            </a:r>
+          </a:p>
+          <a:p>
+            <a:pPr>
+              <a:spcAft>
+                <a:spcPts val="600"/>
+              </a:spcAft>
+              <a:defRPr b="1" sz="2000">
+                <a:solidFill>
+                  <a:srgbClr val="333333"/>
+                </a:solidFill>
+              </a:defRPr>
+            </a:pPr>
+            <a:r>
+              <a:t>Best Practice:</a:t>
+            </a:r>
+          </a:p>
+          <a:p>
+            <a:pPr lvl="1">
+              <a:spcAft>
+                <a:spcPts val="400"/>
+              </a:spcAft>
+              <a:defRPr sz="1600">
+                <a:solidFill>
+                  <a:srgbClr val="333333"/>
+                </a:solidFill>
+              </a:defRPr>
+            </a:pPr>
+            <a:r>
+              <a:t>• Limit nesting to 2-3 levels</a:t>
+            </a:r>
+          </a:p>
+          <a:p>
+            <a:pPr lvl="1">
+              <a:spcAft>
+                <a:spcPts val="400"/>
+              </a:spcAft>
+              <a:defRPr sz="1600">
+                <a:solidFill>
+                  <a:srgbClr val="333333"/>
+                </a:solidFill>
+              </a:defRPr>
+            </a:pPr>
+            <a:r>
+              <a:t>• Consider using and/or instead</a:t>
+            </a:r>
+          </a:p>
+          <a:p>
+            <a:pPr lvl="1">
+              <a:spcAft>
+                <a:spcPts val="400"/>
+              </a:spcAft>
+              <a:defRPr sz="1600">
+                <a:solidFill>
+                  <a:srgbClr val="333333"/>
+                </a:solidFill>
+              </a:defRPr>
+            </a:pPr>
+            <a:r>
+              <a:t>• Keep code readable</a:t>
             </a:r>
           </a:p>
         </p:txBody>
@@ -4009,7 +4235,7 @@
 </p:sld>
 </file>
 
-<file path=ppt/slides/slide4.xml><?xml version="1.0" encoding="utf-8"?>
+<file path=ppt/slides/slide12.xml><?xml version="1.0" encoding="utf-8"?>
 <p:sld xmlns:a="http://schemas.openxmlformats.org/drawingml/2006/main" xmlns:p="http://schemas.openxmlformats.org/presentationml/2006/main" xmlns:r="http://schemas.openxmlformats.org/officeDocument/2006/relationships">
   <p:cSld>
     <p:spTree>
@@ -4113,8 +4339,8 @@
         </p:nvSpPr>
         <p:spPr>
           <a:xfrm>
-            <a:off x="457200" y="365760"/>
-            <a:ext cx="10972800" cy="731520"/>
+            <a:off x="457200" y="320040"/>
+            <a:ext cx="10972800" cy="640080"/>
           </a:xfrm>
           <a:prstGeom prst="rect">
             <a:avLst/>
@@ -4128,71 +4354,28 @@
           <a:lstStyle/>
           <a:p>
             <a:pPr>
-              <a:defRPr sz="4000" b="1">
+              <a:defRPr sz="3600" b="1">
                 <a:solidFill>
                   <a:srgbClr val="003366"/>
                 </a:solidFill>
               </a:defRPr>
             </a:pPr>
             <a:r>
-              <a:t>Comparison Operators ⚖️</a:t>
-            </a:r>
-          </a:p>
-        </p:txBody>
-      </p:sp>
-      <p:sp>
-        <p:nvSpPr>
-          <p:cNvPr id="5" name="Rectangle 4"/>
-          <p:cNvSpPr/>
+              <a:t>Truthy and Falsy Values</a:t>
+            </a:r>
+          </a:p>
+        </p:txBody>
+      </p:sp>
+      <p:sp>
+        <p:nvSpPr>
+          <p:cNvPr id="5" name="TextBox 4"/>
+          <p:cNvSpPr txBox="1"/>
           <p:nvPr/>
         </p:nvSpPr>
         <p:spPr>
           <a:xfrm>
-            <a:off x="457200" y="1005840"/>
-            <a:ext cx="1828800" cy="45720"/>
-          </a:xfrm>
-          <a:prstGeom prst="rect">
-            <a:avLst/>
-          </a:prstGeom>
-          <a:solidFill>
-            <a:srgbClr val="0066CC"/>
-          </a:solidFill>
-          <a:ln>
-            <a:noFill/>
-          </a:ln>
-        </p:spPr>
-        <p:style>
-          <a:lnRef idx="1">
-            <a:schemeClr val="accent1"/>
-          </a:lnRef>
-          <a:fillRef idx="3">
-            <a:schemeClr val="accent1"/>
-          </a:fillRef>
-          <a:effectRef idx="2">
-            <a:schemeClr val="accent1"/>
-          </a:effectRef>
-          <a:fontRef idx="minor">
-            <a:schemeClr val="lt1"/>
-          </a:fontRef>
-        </p:style>
-        <p:txBody>
-          <a:bodyPr rtlCol="0" anchor="ctr"/>
-          <a:lstStyle/>
-          <a:p>
-            <a:pPr algn="ctr"/>
-          </a:p>
-        </p:txBody>
-      </p:sp>
-      <p:sp>
-        <p:nvSpPr>
-          <p:cNvPr id="6" name="TextBox 5"/>
-          <p:cNvSpPr txBox="1"/>
-          <p:nvPr/>
-        </p:nvSpPr>
-        <p:spPr>
-          <a:xfrm>
-            <a:off x="640080" y="1371600"/>
-            <a:ext cx="10789920" cy="4572000"/>
+            <a:off x="640080" y="1188720"/>
+            <a:ext cx="10789920" cy="5303520"/>
           </a:xfrm>
           <a:prstGeom prst="rect">
             <a:avLst/>
@@ -4207,106 +4390,361 @@
           <a:p>
             <a:pPr>
               <a:spcAft>
-                <a:spcPts val="800"/>
-              </a:spcAft>
-              <a:defRPr sz="2000" b="1">
-                <a:solidFill>
-                  <a:srgbClr val="333333"/>
-                </a:solidFill>
-              </a:defRPr>
-            </a:pPr>
-            <a:r>
-              <a:t>== (Equal to)</a:t>
-            </a:r>
-          </a:p>
-          <a:p>
-            <a:pPr>
-              <a:spcAft>
-                <a:spcPts val="800"/>
-              </a:spcAft>
-              <a:defRPr sz="2000" b="1">
-                <a:solidFill>
-                  <a:srgbClr val="333333"/>
-                </a:solidFill>
-              </a:defRPr>
-            </a:pPr>
-            <a:r>
-              <a:t>!= (Not equal to)</a:t>
-            </a:r>
-          </a:p>
-          <a:p>
-            <a:pPr>
-              <a:spcAft>
-                <a:spcPts val="800"/>
-              </a:spcAft>
-              <a:defRPr sz="2000" b="1">
-                <a:solidFill>
-                  <a:srgbClr val="333333"/>
-                </a:solidFill>
-              </a:defRPr>
-            </a:pPr>
-            <a:r>
-              <a:t>&gt; (Greater than)</a:t>
-            </a:r>
-          </a:p>
-          <a:p>
-            <a:pPr>
-              <a:spcAft>
-                <a:spcPts val="800"/>
-              </a:spcAft>
-              <a:defRPr sz="2000" b="1">
-                <a:solidFill>
-                  <a:srgbClr val="333333"/>
-                </a:solidFill>
-              </a:defRPr>
-            </a:pPr>
-            <a:r>
-              <a:t>&lt; (Less than)</a:t>
-            </a:r>
-          </a:p>
-          <a:p>
-            <a:pPr>
-              <a:spcAft>
-                <a:spcPts val="800"/>
-              </a:spcAft>
-              <a:defRPr sz="2000" b="1">
-                <a:solidFill>
-                  <a:srgbClr val="333333"/>
-                </a:solidFill>
-              </a:defRPr>
-            </a:pPr>
-            <a:r>
-              <a:t>&gt;= (Greater or equal)</a:t>
-            </a:r>
-          </a:p>
-          <a:p>
-            <a:pPr>
-              <a:spcAft>
-                <a:spcPts val="800"/>
-              </a:spcAft>
-              <a:defRPr sz="2000" b="1">
-                <a:solidFill>
-                  <a:srgbClr val="333333"/>
-                </a:solidFill>
-              </a:defRPr>
-            </a:pPr>
-            <a:r>
-              <a:t>&lt;= (Less or equal)</a:t>
-            </a:r>
-          </a:p>
-          <a:p>
-            <a:pPr>
-              <a:spcAft>
-                <a:spcPts val="800"/>
-              </a:spcAft>
-              <a:defRPr sz="2000" b="1">
-                <a:solidFill>
-                  <a:srgbClr val="333333"/>
-                </a:solidFill>
-              </a:defRPr>
-            </a:pPr>
-            <a:r>
-              <a:t>⚠️ Important:Use == for comparison, not = (which is for assignment)</a:t>
+                <a:spcPts val="600"/>
+              </a:spcAft>
+              <a:defRPr b="1" sz="2000">
+                <a:solidFill>
+                  <a:srgbClr val="333333"/>
+                </a:solidFill>
+              </a:defRPr>
+            </a:pPr>
+            <a:r>
+              <a:t>Values That Act Like False:</a:t>
+            </a:r>
+          </a:p>
+          <a:p>
+            <a:pPr lvl="1">
+              <a:spcAft>
+                <a:spcPts val="400"/>
+              </a:spcAft>
+              <a:defRPr sz="1600">
+                <a:solidFill>
+                  <a:srgbClr val="333333"/>
+                </a:solidFill>
+              </a:defRPr>
+            </a:pPr>
+            <a:r>
+              <a:t>• False</a:t>
+            </a:r>
+          </a:p>
+          <a:p>
+            <a:pPr lvl="1">
+              <a:spcAft>
+                <a:spcPts val="400"/>
+              </a:spcAft>
+              <a:defRPr sz="1600">
+                <a:solidFill>
+                  <a:srgbClr val="333333"/>
+                </a:solidFill>
+              </a:defRPr>
+            </a:pPr>
+            <a:r>
+              <a:t>• None</a:t>
+            </a:r>
+          </a:p>
+          <a:p>
+            <a:pPr lvl="1">
+              <a:spcAft>
+                <a:spcPts val="400"/>
+              </a:spcAft>
+              <a:defRPr sz="1600">
+                <a:solidFill>
+                  <a:srgbClr val="333333"/>
+                </a:solidFill>
+              </a:defRPr>
+            </a:pPr>
+            <a:r>
+              <a:t>• 0, 0.0</a:t>
+            </a:r>
+          </a:p>
+          <a:p>
+            <a:pPr lvl="1">
+              <a:spcAft>
+                <a:spcPts val="400"/>
+              </a:spcAft>
+              <a:defRPr sz="1600">
+                <a:solidFill>
+                  <a:srgbClr val="333333"/>
+                </a:solidFill>
+              </a:defRPr>
+            </a:pPr>
+            <a:r>
+              <a:t>• "" (empty string)</a:t>
+            </a:r>
+          </a:p>
+          <a:p>
+            <a:pPr lvl="1">
+              <a:spcAft>
+                <a:spcPts val="400"/>
+              </a:spcAft>
+              <a:defRPr sz="1600">
+                <a:solidFill>
+                  <a:srgbClr val="333333"/>
+                </a:solidFill>
+              </a:defRPr>
+            </a:pPr>
+            <a:r>
+              <a:t>• [] (empty list)</a:t>
+            </a:r>
+          </a:p>
+          <a:p>
+            <a:pPr lvl="1">
+              <a:spcAft>
+                <a:spcPts val="400"/>
+              </a:spcAft>
+              <a:defRPr sz="1600">
+                <a:solidFill>
+                  <a:srgbClr val="333333"/>
+                </a:solidFill>
+              </a:defRPr>
+            </a:pPr>
+            <a:r>
+              <a:t>• {} (empty dictionary)</a:t>
+            </a:r>
+          </a:p>
+          <a:p>
+            <a:pPr>
+              <a:spcAft>
+                <a:spcPts val="600"/>
+              </a:spcAft>
+              <a:defRPr b="1" sz="2000">
+                <a:solidFill>
+                  <a:srgbClr val="333333"/>
+                </a:solidFill>
+              </a:defRPr>
+            </a:pPr>
+            <a:r>
+              <a:t>Everything Else is Truthy:</a:t>
+            </a:r>
+          </a:p>
+          <a:p>
+            <a:pPr lvl="1">
+              <a:spcAft>
+                <a:spcPts val="400"/>
+              </a:spcAft>
+              <a:defRPr sz="1600">
+                <a:solidFill>
+                  <a:srgbClr val="333333"/>
+                </a:solidFill>
+              </a:defRPr>
+            </a:pPr>
+            <a:r>
+              <a:t>• True</a:t>
+            </a:r>
+          </a:p>
+          <a:p>
+            <a:pPr lvl="1">
+              <a:spcAft>
+                <a:spcPts val="400"/>
+              </a:spcAft>
+              <a:defRPr sz="1600">
+                <a:solidFill>
+                  <a:srgbClr val="333333"/>
+                </a:solidFill>
+              </a:defRPr>
+            </a:pPr>
+            <a:r>
+              <a:t>• Any non-zero number</a:t>
+            </a:r>
+          </a:p>
+          <a:p>
+            <a:pPr lvl="1">
+              <a:spcAft>
+                <a:spcPts val="400"/>
+              </a:spcAft>
+              <a:defRPr sz="1600">
+                <a:solidFill>
+                  <a:srgbClr val="333333"/>
+                </a:solidFill>
+              </a:defRPr>
+            </a:pPr>
+            <a:r>
+              <a:t>• Any non-empty string</a:t>
+            </a:r>
+          </a:p>
+          <a:p>
+            <a:pPr lvl="1">
+              <a:spcAft>
+                <a:spcPts val="400"/>
+              </a:spcAft>
+              <a:defRPr sz="1600">
+                <a:solidFill>
+                  <a:srgbClr val="333333"/>
+                </a:solidFill>
+              </a:defRPr>
+            </a:pPr>
+            <a:r>
+              <a:t>• Any non-empty collection</a:t>
+            </a:r>
+          </a:p>
+          <a:p>
+            <a:pPr>
+              <a:spcAft>
+                <a:spcPts val="600"/>
+              </a:spcAft>
+              <a:defRPr b="1" sz="2000">
+                <a:solidFill>
+                  <a:srgbClr val="333333"/>
+                </a:solidFill>
+              </a:defRPr>
+            </a:pPr>
+            <a:r>
+              <a:t>Practical Use:</a:t>
+            </a:r>
+          </a:p>
+          <a:p>
+            <a:pPr>
+              <a:spcAft>
+                <a:spcPts val="600"/>
+              </a:spcAft>
+              <a:defRPr b="1" sz="2000">
+                <a:solidFill>
+                  <a:srgbClr val="333333"/>
+                </a:solidFill>
+              </a:defRPr>
+            </a:pPr>
+            <a:r>
+              <a:t>name = input("Name: ")</a:t>
+            </a:r>
+          </a:p>
+          <a:p>
+            <a:pPr>
+              <a:spcAft>
+                <a:spcPts val="600"/>
+              </a:spcAft>
+              <a:defRPr b="1" sz="2000">
+                <a:solidFill>
+                  <a:srgbClr val="333333"/>
+                </a:solidFill>
+              </a:defRPr>
+            </a:pPr>
+            <a:r>
+              <a:t>if name:  # True if not empty</a:t>
+            </a:r>
+          </a:p>
+          <a:p>
+            <a:pPr>
+              <a:spcAft>
+                <a:spcPts val="600"/>
+              </a:spcAft>
+              <a:defRPr sz="1600">
+                <a:solidFill>
+                  <a:srgbClr val="333333"/>
+                </a:solidFill>
+              </a:defRPr>
+            </a:pPr>
+            <a:r>
+              <a:t>    print(f"Hello, {name}")</a:t>
+            </a:r>
+          </a:p>
+          <a:p>
+            <a:pPr>
+              <a:spcAft>
+                <a:spcPts val="600"/>
+              </a:spcAft>
+              <a:defRPr b="1" sz="2000">
+                <a:solidFill>
+                  <a:srgbClr val="333333"/>
+                </a:solidFill>
+              </a:defRPr>
+            </a:pPr>
+            <a:r>
+              <a:t>else:</a:t>
+            </a:r>
+          </a:p>
+          <a:p>
+            <a:pPr>
+              <a:spcAft>
+                <a:spcPts val="600"/>
+              </a:spcAft>
+              <a:defRPr sz="1600">
+                <a:solidFill>
+                  <a:srgbClr val="333333"/>
+                </a:solidFill>
+              </a:defRPr>
+            </a:pPr>
+            <a:r>
+              <a:t>    print("Name required")</a:t>
+            </a:r>
+          </a:p>
+          <a:p>
+            <a:pPr>
+              <a:spcAft>
+                <a:spcPts val="600"/>
+              </a:spcAft>
+              <a:defRPr b="1" sz="2000">
+                <a:solidFill>
+                  <a:srgbClr val="333333"/>
+                </a:solidFill>
+              </a:defRPr>
+            </a:pPr>
+            <a:r>
+              <a:t>Checking Empty Collections:</a:t>
+            </a:r>
+          </a:p>
+          <a:p>
+            <a:pPr>
+              <a:spcAft>
+                <a:spcPts val="600"/>
+              </a:spcAft>
+              <a:defRPr sz="1600">
+                <a:solidFill>
+                  <a:srgbClr val="333333"/>
+                </a:solidFill>
+              </a:defRPr>
+            </a:pPr>
+            <a:r>
+              <a:t>items = []</a:t>
+            </a:r>
+          </a:p>
+          <a:p>
+            <a:pPr>
+              <a:spcAft>
+                <a:spcPts val="600"/>
+              </a:spcAft>
+              <a:defRPr b="1" sz="2000">
+                <a:solidFill>
+                  <a:srgbClr val="333333"/>
+                </a:solidFill>
+              </a:defRPr>
+            </a:pPr>
+            <a:r>
+              <a:t>if items:</a:t>
+            </a:r>
+          </a:p>
+          <a:p>
+            <a:pPr>
+              <a:spcAft>
+                <a:spcPts val="600"/>
+              </a:spcAft>
+              <a:defRPr sz="1600">
+                <a:solidFill>
+                  <a:srgbClr val="333333"/>
+                </a:solidFill>
+              </a:defRPr>
+            </a:pPr>
+            <a:r>
+              <a:t>    print("Has items")</a:t>
+            </a:r>
+          </a:p>
+          <a:p>
+            <a:pPr>
+              <a:spcAft>
+                <a:spcPts val="600"/>
+              </a:spcAft>
+              <a:defRPr b="1" sz="2000">
+                <a:solidFill>
+                  <a:srgbClr val="333333"/>
+                </a:solidFill>
+              </a:defRPr>
+            </a:pPr>
+            <a:r>
+              <a:t>else:</a:t>
+            </a:r>
+          </a:p>
+          <a:p>
+            <a:pPr>
+              <a:spcAft>
+                <a:spcPts val="600"/>
+              </a:spcAft>
+              <a:defRPr sz="1600">
+                <a:solidFill>
+                  <a:srgbClr val="333333"/>
+                </a:solidFill>
+              </a:defRPr>
+            </a:pPr>
+            <a:r>
+              <a:t>    print("Empty list")</a:t>
             </a:r>
           </a:p>
         </p:txBody>
@@ -4319,7 +4757,7 @@
 </p:sld>
 </file>
 
-<file path=ppt/slides/slide5.xml><?xml version="1.0" encoding="utf-8"?>
+<file path=ppt/slides/slide13.xml><?xml version="1.0" encoding="utf-8"?>
 <p:sld xmlns:a="http://schemas.openxmlformats.org/drawingml/2006/main" xmlns:p="http://schemas.openxmlformats.org/presentationml/2006/main" xmlns:r="http://schemas.openxmlformats.org/officeDocument/2006/relationships">
   <p:cSld>
     <p:spTree>
@@ -4423,8 +4861,8 @@
         </p:nvSpPr>
         <p:spPr>
           <a:xfrm>
-            <a:off x="457200" y="365760"/>
-            <a:ext cx="10972800" cy="731520"/>
+            <a:off x="457200" y="320040"/>
+            <a:ext cx="10972800" cy="640080"/>
           </a:xfrm>
           <a:prstGeom prst="rect">
             <a:avLst/>
@@ -4438,71 +4876,28 @@
           <a:lstStyle/>
           <a:p>
             <a:pPr>
-              <a:defRPr sz="4000" b="1">
+              <a:defRPr sz="3600" b="1">
                 <a:solidFill>
                   <a:srgbClr val="003366"/>
                 </a:solidFill>
               </a:defRPr>
             </a:pPr>
             <a:r>
-              <a:t>The if Statement</a:t>
-            </a:r>
-          </a:p>
-        </p:txBody>
-      </p:sp>
-      <p:sp>
-        <p:nvSpPr>
-          <p:cNvPr id="5" name="Rectangle 4"/>
-          <p:cNvSpPr/>
+              <a:t>Common Patterns and Best Practices</a:t>
+            </a:r>
+          </a:p>
+        </p:txBody>
+      </p:sp>
+      <p:sp>
+        <p:nvSpPr>
+          <p:cNvPr id="5" name="TextBox 4"/>
+          <p:cNvSpPr txBox="1"/>
           <p:nvPr/>
         </p:nvSpPr>
         <p:spPr>
           <a:xfrm>
-            <a:off x="457200" y="1005840"/>
-            <a:ext cx="1828800" cy="45720"/>
-          </a:xfrm>
-          <a:prstGeom prst="rect">
-            <a:avLst/>
-          </a:prstGeom>
-          <a:solidFill>
-            <a:srgbClr val="0066CC"/>
-          </a:solidFill>
-          <a:ln>
-            <a:noFill/>
-          </a:ln>
-        </p:spPr>
-        <p:style>
-          <a:lnRef idx="1">
-            <a:schemeClr val="accent1"/>
-          </a:lnRef>
-          <a:fillRef idx="3">
-            <a:schemeClr val="accent1"/>
-          </a:fillRef>
-          <a:effectRef idx="2">
-            <a:schemeClr val="accent1"/>
-          </a:effectRef>
-          <a:fontRef idx="minor">
-            <a:schemeClr val="lt1"/>
-          </a:fontRef>
-        </p:style>
-        <p:txBody>
-          <a:bodyPr rtlCol="0" anchor="ctr"/>
-          <a:lstStyle/>
-          <a:p>
-            <a:pPr algn="ctr"/>
-          </a:p>
-        </p:txBody>
-      </p:sp>
-      <p:sp>
-        <p:nvSpPr>
-          <p:cNvPr id="6" name="TextBox 5"/>
-          <p:cNvSpPr txBox="1"/>
-          <p:nvPr/>
-        </p:nvSpPr>
-        <p:spPr>
-          <a:xfrm>
-            <a:off x="640080" y="1371600"/>
-            <a:ext cx="10789920" cy="4572000"/>
+            <a:off x="640080" y="1188720"/>
+            <a:ext cx="10789920" cy="5303520"/>
           </a:xfrm>
           <a:prstGeom prst="rect">
             <a:avLst/>
@@ -4517,61 +4912,376 @@
           <a:p>
             <a:pPr>
               <a:spcAft>
-                <a:spcPts val="800"/>
-              </a:spcAft>
-              <a:defRPr sz="2000" b="1">
-                <a:solidFill>
-                  <a:srgbClr val="333333"/>
-                </a:solidFill>
-              </a:defRPr>
-            </a:pPr>
-            <a:r>
-              <a:t>Execute code only if a condition is True</a:t>
-            </a:r>
-          </a:p>
-          <a:p>
-            <a:pPr>
-              <a:spcAft>
-                <a:spcPts val="800"/>
-              </a:spcAft>
-              <a:defRPr sz="2000" b="1">
-                <a:solidFill>
-                  <a:srgbClr val="333333"/>
-                </a:solidFill>
-              </a:defRPr>
-            </a:pPr>
-            <a:r>
-              <a:t>Syntax:</a:t>
-            </a:r>
-          </a:p>
-          <a:p>
-            <a:pPr>
-              <a:spcAft>
-                <a:spcPts val="800"/>
-              </a:spcAft>
-              <a:defRPr sz="2000" b="1">
-                <a:solidFill>
-                  <a:srgbClr val="333333"/>
-                </a:solidFill>
-              </a:defRPr>
-            </a:pPr>
-            <a:r>
-              <a:t>Example:</a:t>
-            </a:r>
-          </a:p>
-          <a:p>
-            <a:pPr>
-              <a:spcAft>
-                <a:spcPts val="800"/>
-              </a:spcAft>
-              <a:defRPr sz="2000" b="1">
-                <a:solidFill>
-                  <a:srgbClr val="333333"/>
-                </a:solidFill>
-              </a:defRPr>
-            </a:pPr>
-            <a:r>
-              <a:t>Key Point:The colon (:) and indentation are required!</a:t>
+                <a:spcPts val="600"/>
+              </a:spcAft>
+              <a:defRPr b="1" sz="2000">
+                <a:solidFill>
+                  <a:srgbClr val="333333"/>
+                </a:solidFill>
+              </a:defRPr>
+            </a:pPr>
+            <a:r>
+              <a:t>Pattern 1: Validation</a:t>
+            </a:r>
+          </a:p>
+          <a:p>
+            <a:pPr>
+              <a:spcAft>
+                <a:spcPts val="600"/>
+              </a:spcAft>
+              <a:defRPr b="1" sz="2000">
+                <a:solidFill>
+                  <a:srgbClr val="333333"/>
+                </a:solidFill>
+              </a:defRPr>
+            </a:pPr>
+            <a:r>
+              <a:t>if not username:</a:t>
+            </a:r>
+          </a:p>
+          <a:p>
+            <a:pPr>
+              <a:spcAft>
+                <a:spcPts val="600"/>
+              </a:spcAft>
+              <a:defRPr sz="1600">
+                <a:solidFill>
+                  <a:srgbClr val="333333"/>
+                </a:solidFill>
+              </a:defRPr>
+            </a:pPr>
+            <a:r>
+              <a:t>    print("Username required")</a:t>
+            </a:r>
+          </a:p>
+          <a:p>
+            <a:pPr>
+              <a:spcAft>
+                <a:spcPts val="600"/>
+              </a:spcAft>
+              <a:defRPr b="1" sz="2000">
+                <a:solidFill>
+                  <a:srgbClr val="333333"/>
+                </a:solidFill>
+              </a:defRPr>
+            </a:pPr>
+            <a:r>
+              <a:t>elif len(username) &lt; 3:</a:t>
+            </a:r>
+          </a:p>
+          <a:p>
+            <a:pPr>
+              <a:spcAft>
+                <a:spcPts val="600"/>
+              </a:spcAft>
+              <a:defRPr sz="1600">
+                <a:solidFill>
+                  <a:srgbClr val="333333"/>
+                </a:solidFill>
+              </a:defRPr>
+            </a:pPr>
+            <a:r>
+              <a:t>    print("Username too short")</a:t>
+            </a:r>
+          </a:p>
+          <a:p>
+            <a:pPr>
+              <a:spcAft>
+                <a:spcPts val="600"/>
+              </a:spcAft>
+              <a:defRPr b="1" sz="2000">
+                <a:solidFill>
+                  <a:srgbClr val="333333"/>
+                </a:solidFill>
+              </a:defRPr>
+            </a:pPr>
+            <a:r>
+              <a:t>else:</a:t>
+            </a:r>
+          </a:p>
+          <a:p>
+            <a:pPr>
+              <a:spcAft>
+                <a:spcPts val="600"/>
+              </a:spcAft>
+              <a:defRPr sz="1600">
+                <a:solidFill>
+                  <a:srgbClr val="333333"/>
+                </a:solidFill>
+              </a:defRPr>
+            </a:pPr>
+            <a:r>
+              <a:t>    print("Valid username")</a:t>
+            </a:r>
+          </a:p>
+          <a:p>
+            <a:pPr>
+              <a:spcAft>
+                <a:spcPts val="600"/>
+              </a:spcAft>
+              <a:defRPr b="1" sz="2000">
+                <a:solidFill>
+                  <a:srgbClr val="333333"/>
+                </a:solidFill>
+              </a:defRPr>
+            </a:pPr>
+            <a:r>
+              <a:t>Pattern 2: Range Checking</a:t>
+            </a:r>
+          </a:p>
+          <a:p>
+            <a:pPr>
+              <a:spcAft>
+                <a:spcPts val="600"/>
+              </a:spcAft>
+              <a:defRPr b="1" sz="2000">
+                <a:solidFill>
+                  <a:srgbClr val="333333"/>
+                </a:solidFill>
+              </a:defRPr>
+            </a:pPr>
+            <a:r>
+              <a:t>if 0 &lt;= score &lt;= 100:</a:t>
+            </a:r>
+          </a:p>
+          <a:p>
+            <a:pPr>
+              <a:spcAft>
+                <a:spcPts val="600"/>
+              </a:spcAft>
+              <a:defRPr sz="1600">
+                <a:solidFill>
+                  <a:srgbClr val="333333"/>
+                </a:solidFill>
+              </a:defRPr>
+            </a:pPr>
+            <a:r>
+              <a:t>    print("Valid score")</a:t>
+            </a:r>
+          </a:p>
+          <a:p>
+            <a:pPr>
+              <a:spcAft>
+                <a:spcPts val="600"/>
+              </a:spcAft>
+              <a:defRPr b="1" sz="2000">
+                <a:solidFill>
+                  <a:srgbClr val="333333"/>
+                </a:solidFill>
+              </a:defRPr>
+            </a:pPr>
+            <a:r>
+              <a:t>Pattern 3: Menu Selection</a:t>
+            </a:r>
+          </a:p>
+          <a:p>
+            <a:pPr>
+              <a:spcAft>
+                <a:spcPts val="600"/>
+              </a:spcAft>
+              <a:defRPr b="1" sz="2000">
+                <a:solidFill>
+                  <a:srgbClr val="333333"/>
+                </a:solidFill>
+              </a:defRPr>
+            </a:pPr>
+            <a:r>
+              <a:t>choice = input("Choose (1-3): ")</a:t>
+            </a:r>
+          </a:p>
+          <a:p>
+            <a:pPr>
+              <a:spcAft>
+                <a:spcPts val="600"/>
+              </a:spcAft>
+              <a:defRPr b="1" sz="2000">
+                <a:solidFill>
+                  <a:srgbClr val="333333"/>
+                </a:solidFill>
+              </a:defRPr>
+            </a:pPr>
+            <a:r>
+              <a:t>if choice == "1":</a:t>
+            </a:r>
+          </a:p>
+          <a:p>
+            <a:pPr>
+              <a:spcAft>
+                <a:spcPts val="600"/>
+              </a:spcAft>
+              <a:defRPr sz="1600">
+                <a:solidFill>
+                  <a:srgbClr val="333333"/>
+                </a:solidFill>
+              </a:defRPr>
+            </a:pPr>
+            <a:r>
+              <a:t>    print("Option 1")</a:t>
+            </a:r>
+          </a:p>
+          <a:p>
+            <a:pPr>
+              <a:spcAft>
+                <a:spcPts val="600"/>
+              </a:spcAft>
+              <a:defRPr b="1" sz="2000">
+                <a:solidFill>
+                  <a:srgbClr val="333333"/>
+                </a:solidFill>
+              </a:defRPr>
+            </a:pPr>
+            <a:r>
+              <a:t>elif choice == "2":</a:t>
+            </a:r>
+          </a:p>
+          <a:p>
+            <a:pPr>
+              <a:spcAft>
+                <a:spcPts val="600"/>
+              </a:spcAft>
+              <a:defRPr sz="1600">
+                <a:solidFill>
+                  <a:srgbClr val="333333"/>
+                </a:solidFill>
+              </a:defRPr>
+            </a:pPr>
+            <a:r>
+              <a:t>    print("Option 2")</a:t>
+            </a:r>
+          </a:p>
+          <a:p>
+            <a:pPr>
+              <a:spcAft>
+                <a:spcPts val="600"/>
+              </a:spcAft>
+              <a:defRPr b="1" sz="2000">
+                <a:solidFill>
+                  <a:srgbClr val="333333"/>
+                </a:solidFill>
+              </a:defRPr>
+            </a:pPr>
+            <a:r>
+              <a:t>elif choice == "3":</a:t>
+            </a:r>
+          </a:p>
+          <a:p>
+            <a:pPr>
+              <a:spcAft>
+                <a:spcPts val="600"/>
+              </a:spcAft>
+              <a:defRPr sz="1600">
+                <a:solidFill>
+                  <a:srgbClr val="333333"/>
+                </a:solidFill>
+              </a:defRPr>
+            </a:pPr>
+            <a:r>
+              <a:t>    print("Option 3")</a:t>
+            </a:r>
+          </a:p>
+          <a:p>
+            <a:pPr>
+              <a:spcAft>
+                <a:spcPts val="600"/>
+              </a:spcAft>
+              <a:defRPr b="1" sz="2000">
+                <a:solidFill>
+                  <a:srgbClr val="333333"/>
+                </a:solidFill>
+              </a:defRPr>
+            </a:pPr>
+            <a:r>
+              <a:t>else:</a:t>
+            </a:r>
+          </a:p>
+          <a:p>
+            <a:pPr>
+              <a:spcAft>
+                <a:spcPts val="600"/>
+              </a:spcAft>
+              <a:defRPr sz="1600">
+                <a:solidFill>
+                  <a:srgbClr val="333333"/>
+                </a:solidFill>
+              </a:defRPr>
+            </a:pPr>
+            <a:r>
+              <a:t>    print("Invalid choice")</a:t>
+            </a:r>
+          </a:p>
+          <a:p>
+            <a:pPr>
+              <a:spcAft>
+                <a:spcPts val="600"/>
+              </a:spcAft>
+              <a:defRPr b="1" sz="2000">
+                <a:solidFill>
+                  <a:srgbClr val="333333"/>
+                </a:solidFill>
+              </a:defRPr>
+            </a:pPr>
+            <a:r>
+              <a:t>Best Practices:</a:t>
+            </a:r>
+          </a:p>
+          <a:p>
+            <a:pPr lvl="1">
+              <a:spcAft>
+                <a:spcPts val="400"/>
+              </a:spcAft>
+              <a:defRPr sz="1600">
+                <a:solidFill>
+                  <a:srgbClr val="333333"/>
+                </a:solidFill>
+              </a:defRPr>
+            </a:pPr>
+            <a:r>
+              <a:t>• Keep conditions simple</a:t>
+            </a:r>
+          </a:p>
+          <a:p>
+            <a:pPr lvl="1">
+              <a:spcAft>
+                <a:spcPts val="400"/>
+              </a:spcAft>
+              <a:defRPr sz="1600">
+                <a:solidFill>
+                  <a:srgbClr val="333333"/>
+                </a:solidFill>
+              </a:defRPr>
+            </a:pPr>
+            <a:r>
+              <a:t>• Use descriptive variable names</a:t>
+            </a:r>
+          </a:p>
+          <a:p>
+            <a:pPr lvl="1">
+              <a:spcAft>
+                <a:spcPts val="400"/>
+              </a:spcAft>
+              <a:defRPr sz="1600">
+                <a:solidFill>
+                  <a:srgbClr val="333333"/>
+                </a:solidFill>
+              </a:defRPr>
+            </a:pPr>
+            <a:r>
+              <a:t>• Handle all cases</a:t>
+            </a:r>
+          </a:p>
+          <a:p>
+            <a:pPr lvl="1">
+              <a:spcAft>
+                <a:spcPts val="400"/>
+              </a:spcAft>
+              <a:defRPr sz="1600">
+                <a:solidFill>
+                  <a:srgbClr val="333333"/>
+                </a:solidFill>
+              </a:defRPr>
+            </a:pPr>
+            <a:r>
+              <a:t>• Avoid deep nesting</a:t>
             </a:r>
           </a:p>
         </p:txBody>
@@ -4584,7 +5294,7 @@
 </p:sld>
 </file>
 
-<file path=ppt/slides/slide6.xml><?xml version="1.0" encoding="utf-8"?>
+<file path=ppt/slides/slide2.xml><?xml version="1.0" encoding="utf-8"?>
 <p:sld xmlns:a="http://schemas.openxmlformats.org/drawingml/2006/main" xmlns:p="http://schemas.openxmlformats.org/presentationml/2006/main" xmlns:r="http://schemas.openxmlformats.org/officeDocument/2006/relationships">
   <p:cSld>
     <p:spTree>
@@ -4688,8 +5398,8 @@
         </p:nvSpPr>
         <p:spPr>
           <a:xfrm>
-            <a:off x="457200" y="365760"/>
-            <a:ext cx="10972800" cy="731520"/>
+            <a:off x="457200" y="320040"/>
+            <a:ext cx="10972800" cy="640080"/>
           </a:xfrm>
           <a:prstGeom prst="rect">
             <a:avLst/>
@@ -4703,71 +5413,28 @@
           <a:lstStyle/>
           <a:p>
             <a:pPr>
-              <a:defRPr sz="4000" b="1">
+              <a:defRPr sz="3600" b="1">
                 <a:solidFill>
                   <a:srgbClr val="003366"/>
                 </a:solidFill>
               </a:defRPr>
             </a:pPr>
             <a:r>
-              <a:t>The if-else Statement 🔀</a:t>
-            </a:r>
-          </a:p>
-        </p:txBody>
-      </p:sp>
-      <p:sp>
-        <p:nvSpPr>
-          <p:cNvPr id="5" name="Rectangle 4"/>
-          <p:cNvSpPr/>
+              <a:t>Boolean Values: True and False</a:t>
+            </a:r>
+          </a:p>
+        </p:txBody>
+      </p:sp>
+      <p:sp>
+        <p:nvSpPr>
+          <p:cNvPr id="5" name="TextBox 4"/>
+          <p:cNvSpPr txBox="1"/>
           <p:nvPr/>
         </p:nvSpPr>
         <p:spPr>
           <a:xfrm>
-            <a:off x="457200" y="1005840"/>
-            <a:ext cx="1828800" cy="45720"/>
-          </a:xfrm>
-          <a:prstGeom prst="rect">
-            <a:avLst/>
-          </a:prstGeom>
-          <a:solidFill>
-            <a:srgbClr val="0066CC"/>
-          </a:solidFill>
-          <a:ln>
-            <a:noFill/>
-          </a:ln>
-        </p:spPr>
-        <p:style>
-          <a:lnRef idx="1">
-            <a:schemeClr val="accent1"/>
-          </a:lnRef>
-          <a:fillRef idx="3">
-            <a:schemeClr val="accent1"/>
-          </a:fillRef>
-          <a:effectRef idx="2">
-            <a:schemeClr val="accent1"/>
-          </a:effectRef>
-          <a:fontRef idx="minor">
-            <a:schemeClr val="lt1"/>
-          </a:fontRef>
-        </p:style>
-        <p:txBody>
-          <a:bodyPr rtlCol="0" anchor="ctr"/>
-          <a:lstStyle/>
-          <a:p>
-            <a:pPr algn="ctr"/>
-          </a:p>
-        </p:txBody>
-      </p:sp>
-      <p:sp>
-        <p:nvSpPr>
-          <p:cNvPr id="6" name="TextBox 5"/>
-          <p:cNvSpPr txBox="1"/>
-          <p:nvPr/>
-        </p:nvSpPr>
-        <p:spPr>
-          <a:xfrm>
-            <a:off x="640080" y="1371600"/>
-            <a:ext cx="10789920" cy="4572000"/>
+            <a:off x="640080" y="1188720"/>
+            <a:ext cx="10789920" cy="5303520"/>
           </a:xfrm>
           <a:prstGeom prst="rect">
             <a:avLst/>
@@ -4782,46 +5449,271 @@
           <a:p>
             <a:pPr>
               <a:spcAft>
-                <a:spcPts val="800"/>
-              </a:spcAft>
-              <a:defRPr sz="2000" b="1">
-                <a:solidFill>
-                  <a:srgbClr val="333333"/>
-                </a:solidFill>
-              </a:defRPr>
-            </a:pPr>
-            <a:r>
-              <a:t>Do one thing if True, something else if False</a:t>
-            </a:r>
-          </a:p>
-          <a:p>
-            <a:pPr>
-              <a:spcAft>
-                <a:spcPts val="800"/>
-              </a:spcAft>
-              <a:defRPr sz="2000" b="1">
-                <a:solidFill>
-                  <a:srgbClr val="333333"/>
-                </a:solidFill>
-              </a:defRPr>
-            </a:pPr>
-            <a:r>
-              <a:t>Syntax:</a:t>
-            </a:r>
-          </a:p>
-          <a:p>
-            <a:pPr>
-              <a:spcAft>
-                <a:spcPts val="800"/>
-              </a:spcAft>
-              <a:defRPr sz="2000" b="1">
-                <a:solidFill>
-                  <a:srgbClr val="333333"/>
-                </a:solidFill>
-              </a:defRPr>
-            </a:pPr>
-            <a:r>
-              <a:t>Example:</a:t>
+                <a:spcPts val="600"/>
+              </a:spcAft>
+              <a:defRPr b="1" sz="2000">
+                <a:solidFill>
+                  <a:srgbClr val="333333"/>
+                </a:solidFill>
+              </a:defRPr>
+            </a:pPr>
+            <a:r>
+              <a:t>Boolean Data Type:</a:t>
+            </a:r>
+          </a:p>
+          <a:p>
+            <a:pPr lvl="1">
+              <a:spcAft>
+                <a:spcPts val="400"/>
+              </a:spcAft>
+              <a:defRPr sz="1600">
+                <a:solidFill>
+                  <a:srgbClr val="333333"/>
+                </a:solidFill>
+              </a:defRPr>
+            </a:pPr>
+            <a:r>
+              <a:t>• Only two values: True and False</a:t>
+            </a:r>
+          </a:p>
+          <a:p>
+            <a:pPr lvl="1">
+              <a:spcAft>
+                <a:spcPts val="400"/>
+              </a:spcAft>
+              <a:defRPr sz="1600">
+                <a:solidFill>
+                  <a:srgbClr val="333333"/>
+                </a:solidFill>
+              </a:defRPr>
+            </a:pPr>
+            <a:r>
+              <a:t>• Used for decision making</a:t>
+            </a:r>
+          </a:p>
+          <a:p>
+            <a:pPr lvl="1">
+              <a:spcAft>
+                <a:spcPts val="400"/>
+              </a:spcAft>
+              <a:defRPr sz="1600">
+                <a:solidFill>
+                  <a:srgbClr val="333333"/>
+                </a:solidFill>
+              </a:defRPr>
+            </a:pPr>
+            <a:r>
+              <a:t>• Result of comparisons</a:t>
+            </a:r>
+          </a:p>
+          <a:p>
+            <a:pPr>
+              <a:spcAft>
+                <a:spcPts val="600"/>
+              </a:spcAft>
+              <a:defRPr b="1" sz="2000">
+                <a:solidFill>
+                  <a:srgbClr val="333333"/>
+                </a:solidFill>
+              </a:defRPr>
+            </a:pPr>
+            <a:r>
+              <a:t>Creating Booleans:</a:t>
+            </a:r>
+          </a:p>
+          <a:p>
+            <a:pPr>
+              <a:spcAft>
+                <a:spcPts val="600"/>
+              </a:spcAft>
+              <a:defRPr sz="1600">
+                <a:solidFill>
+                  <a:srgbClr val="333333"/>
+                </a:solidFill>
+              </a:defRPr>
+            </a:pPr>
+            <a:r>
+              <a:t>is_student = True</a:t>
+            </a:r>
+          </a:p>
+          <a:p>
+            <a:pPr>
+              <a:spcAft>
+                <a:spcPts val="600"/>
+              </a:spcAft>
+              <a:defRPr sz="1600">
+                <a:solidFill>
+                  <a:srgbClr val="333333"/>
+                </a:solidFill>
+              </a:defRPr>
+            </a:pPr>
+            <a:r>
+              <a:t>is_raining = False</a:t>
+            </a:r>
+          </a:p>
+          <a:p>
+            <a:pPr>
+              <a:spcAft>
+                <a:spcPts val="600"/>
+              </a:spcAft>
+              <a:defRPr b="1" sz="2000">
+                <a:solidFill>
+                  <a:srgbClr val="333333"/>
+                </a:solidFill>
+              </a:defRPr>
+            </a:pPr>
+            <a:r>
+              <a:t>Boolean from Comparisons:</a:t>
+            </a:r>
+          </a:p>
+          <a:p>
+            <a:pPr>
+              <a:spcAft>
+                <a:spcPts val="600"/>
+              </a:spcAft>
+              <a:defRPr sz="1600">
+                <a:solidFill>
+                  <a:srgbClr val="333333"/>
+                </a:solidFill>
+              </a:defRPr>
+            </a:pPr>
+            <a:r>
+              <a:t>age = 25</a:t>
+            </a:r>
+          </a:p>
+          <a:p>
+            <a:pPr>
+              <a:spcAft>
+                <a:spcPts val="600"/>
+              </a:spcAft>
+              <a:defRPr sz="1600">
+                <a:solidFill>
+                  <a:srgbClr val="333333"/>
+                </a:solidFill>
+              </a:defRPr>
+            </a:pPr>
+            <a:r>
+              <a:t>is_adult = age &gt;= 18  # True</a:t>
+            </a:r>
+          </a:p>
+          <a:p>
+            <a:pPr>
+              <a:spcAft>
+                <a:spcPts val="600"/>
+              </a:spcAft>
+              <a:defRPr b="1" sz="2000">
+                <a:solidFill>
+                  <a:srgbClr val="333333"/>
+                </a:solidFill>
+              </a:defRPr>
+            </a:pPr>
+            <a:r>
+              <a:t>Type Checking:</a:t>
+            </a:r>
+          </a:p>
+          <a:p>
+            <a:pPr>
+              <a:spcAft>
+                <a:spcPts val="600"/>
+              </a:spcAft>
+              <a:defRPr sz="1600">
+                <a:solidFill>
+                  <a:srgbClr val="333333"/>
+                </a:solidFill>
+              </a:defRPr>
+            </a:pPr>
+            <a:r>
+              <a:t>type(True)  # &lt;class 'bool'&gt;</a:t>
+            </a:r>
+          </a:p>
+          <a:p>
+            <a:pPr>
+              <a:spcAft>
+                <a:spcPts val="600"/>
+              </a:spcAft>
+              <a:defRPr b="1" sz="2000">
+                <a:solidFill>
+                  <a:srgbClr val="333333"/>
+                </a:solidFill>
+              </a:defRPr>
+            </a:pPr>
+            <a:r>
+              <a:t>Boolean in Conditions:</a:t>
+            </a:r>
+          </a:p>
+          <a:p>
+            <a:pPr>
+              <a:spcAft>
+                <a:spcPts val="600"/>
+              </a:spcAft>
+              <a:defRPr b="1" sz="2000">
+                <a:solidFill>
+                  <a:srgbClr val="333333"/>
+                </a:solidFill>
+              </a:defRPr>
+            </a:pPr>
+            <a:r>
+              <a:t>if is_student:</a:t>
+            </a:r>
+          </a:p>
+          <a:p>
+            <a:pPr>
+              <a:spcAft>
+                <a:spcPts val="600"/>
+              </a:spcAft>
+              <a:defRPr sz="1600">
+                <a:solidFill>
+                  <a:srgbClr val="333333"/>
+                </a:solidFill>
+              </a:defRPr>
+            </a:pPr>
+            <a:r>
+              <a:t>    print("Student discount available")</a:t>
+            </a:r>
+          </a:p>
+          <a:p>
+            <a:pPr>
+              <a:spcAft>
+                <a:spcPts val="600"/>
+              </a:spcAft>
+              <a:defRPr b="1" sz="2000">
+                <a:solidFill>
+                  <a:srgbClr val="333333"/>
+                </a:solidFill>
+              </a:defRPr>
+            </a:pPr>
+            <a:r>
+              <a:t>Important: Capitalization Matters</a:t>
+            </a:r>
+          </a:p>
+          <a:p>
+            <a:pPr lvl="1">
+              <a:spcAft>
+                <a:spcPts val="400"/>
+              </a:spcAft>
+              <a:defRPr sz="1600">
+                <a:solidFill>
+                  <a:srgbClr val="333333"/>
+                </a:solidFill>
+              </a:defRPr>
+            </a:pPr>
+            <a:r>
+              <a:t>• True and False (capital T and F)</a:t>
+            </a:r>
+          </a:p>
+          <a:p>
+            <a:pPr lvl="1">
+              <a:spcAft>
+                <a:spcPts val="400"/>
+              </a:spcAft>
+              <a:defRPr sz="1600">
+                <a:solidFill>
+                  <a:srgbClr val="333333"/>
+                </a:solidFill>
+              </a:defRPr>
+            </a:pPr>
+            <a:r>
+              <a:t>• true and false are invalid</a:t>
             </a:r>
           </a:p>
         </p:txBody>
@@ -4834,7 +5726,7 @@
 </p:sld>
 </file>
 
-<file path=ppt/slides/slide7.xml><?xml version="1.0" encoding="utf-8"?>
+<file path=ppt/slides/slide3.xml><?xml version="1.0" encoding="utf-8"?>
 <p:sld xmlns:a="http://schemas.openxmlformats.org/drawingml/2006/main" xmlns:p="http://schemas.openxmlformats.org/presentationml/2006/main" xmlns:r="http://schemas.openxmlformats.org/officeDocument/2006/relationships">
   <p:cSld>
     <p:spTree>
@@ -4938,8 +5830,8 @@
         </p:nvSpPr>
         <p:spPr>
           <a:xfrm>
-            <a:off x="457200" y="365760"/>
-            <a:ext cx="10972800" cy="731520"/>
+            <a:off x="457200" y="320040"/>
+            <a:ext cx="10972800" cy="640080"/>
           </a:xfrm>
           <a:prstGeom prst="rect">
             <a:avLst/>
@@ -4953,71 +5845,28 @@
           <a:lstStyle/>
           <a:p>
             <a:pPr>
-              <a:defRPr sz="4000" b="1">
+              <a:defRPr sz="3600" b="1">
                 <a:solidFill>
                   <a:srgbClr val="003366"/>
                 </a:solidFill>
               </a:defRPr>
             </a:pPr>
             <a:r>
-              <a:t>The if-elif-else Statement 🔀🔀</a:t>
-            </a:r>
-          </a:p>
-        </p:txBody>
-      </p:sp>
-      <p:sp>
-        <p:nvSpPr>
-          <p:cNvPr id="5" name="Rectangle 4"/>
-          <p:cNvSpPr/>
+              <a:t>Comparison Operators</a:t>
+            </a:r>
+          </a:p>
+        </p:txBody>
+      </p:sp>
+      <p:sp>
+        <p:nvSpPr>
+          <p:cNvPr id="5" name="TextBox 4"/>
+          <p:cNvSpPr txBox="1"/>
           <p:nvPr/>
         </p:nvSpPr>
         <p:spPr>
           <a:xfrm>
-            <a:off x="457200" y="1005840"/>
-            <a:ext cx="1828800" cy="45720"/>
-          </a:xfrm>
-          <a:prstGeom prst="rect">
-            <a:avLst/>
-          </a:prstGeom>
-          <a:solidFill>
-            <a:srgbClr val="0066CC"/>
-          </a:solidFill>
-          <a:ln>
-            <a:noFill/>
-          </a:ln>
-        </p:spPr>
-        <p:style>
-          <a:lnRef idx="1">
-            <a:schemeClr val="accent1"/>
-          </a:lnRef>
-          <a:fillRef idx="3">
-            <a:schemeClr val="accent1"/>
-          </a:fillRef>
-          <a:effectRef idx="2">
-            <a:schemeClr val="accent1"/>
-          </a:effectRef>
-          <a:fontRef idx="minor">
-            <a:schemeClr val="lt1"/>
-          </a:fontRef>
-        </p:style>
-        <p:txBody>
-          <a:bodyPr rtlCol="0" anchor="ctr"/>
-          <a:lstStyle/>
-          <a:p>
-            <a:pPr algn="ctr"/>
-          </a:p>
-        </p:txBody>
-      </p:sp>
-      <p:sp>
-        <p:nvSpPr>
-          <p:cNvPr id="6" name="TextBox 5"/>
-          <p:cNvSpPr txBox="1"/>
-          <p:nvPr/>
-        </p:nvSpPr>
-        <p:spPr>
-          <a:xfrm>
-            <a:off x="640080" y="1371600"/>
-            <a:ext cx="10789920" cy="4572000"/>
+            <a:off x="640080" y="1188720"/>
+            <a:ext cx="10789920" cy="5303520"/>
           </a:xfrm>
           <a:prstGeom prst="rect">
             <a:avLst/>
@@ -5032,46 +5881,301 @@
           <a:p>
             <a:pPr>
               <a:spcAft>
-                <a:spcPts val="800"/>
-              </a:spcAft>
-              <a:defRPr sz="2000" b="1">
-                <a:solidFill>
-                  <a:srgbClr val="333333"/>
-                </a:solidFill>
-              </a:defRPr>
-            </a:pPr>
-            <a:r>
-              <a:t>Check multiple conditions in order</a:t>
-            </a:r>
-          </a:p>
-          <a:p>
-            <a:pPr>
-              <a:spcAft>
-                <a:spcPts val="800"/>
-              </a:spcAft>
-              <a:defRPr sz="2000" b="1">
-                <a:solidFill>
-                  <a:srgbClr val="333333"/>
-                </a:solidFill>
-              </a:defRPr>
-            </a:pPr>
-            <a:r>
-              <a:t>Syntax:</a:t>
-            </a:r>
-          </a:p>
-          <a:p>
-            <a:pPr>
-              <a:spcAft>
-                <a:spcPts val="800"/>
-              </a:spcAft>
-              <a:defRPr sz="2000" b="1">
-                <a:solidFill>
-                  <a:srgbClr val="333333"/>
-                </a:solidFill>
-              </a:defRPr>
-            </a:pPr>
-            <a:r>
-              <a:t>Example: Grade System</a:t>
+                <a:spcPts val="600"/>
+              </a:spcAft>
+              <a:defRPr b="1" sz="2000">
+                <a:solidFill>
+                  <a:srgbClr val="333333"/>
+                </a:solidFill>
+              </a:defRPr>
+            </a:pPr>
+            <a:r>
+              <a:t>Comparing Values:</a:t>
+            </a:r>
+          </a:p>
+          <a:p>
+            <a:pPr>
+              <a:spcAft>
+                <a:spcPts val="600"/>
+              </a:spcAft>
+              <a:defRPr b="1" sz="2000">
+                <a:solidFill>
+                  <a:srgbClr val="333333"/>
+                </a:solidFill>
+              </a:defRPr>
+            </a:pPr>
+            <a:r>
+              <a:t>Equal to (==):</a:t>
+            </a:r>
+          </a:p>
+          <a:p>
+            <a:pPr>
+              <a:spcAft>
+                <a:spcPts val="600"/>
+              </a:spcAft>
+              <a:defRPr sz="1600">
+                <a:solidFill>
+                  <a:srgbClr val="333333"/>
+                </a:solidFill>
+              </a:defRPr>
+            </a:pPr>
+            <a:r>
+              <a:t>5 == 5   # True</a:t>
+            </a:r>
+          </a:p>
+          <a:p>
+            <a:pPr>
+              <a:spcAft>
+                <a:spcPts val="600"/>
+              </a:spcAft>
+              <a:defRPr sz="1600">
+                <a:solidFill>
+                  <a:srgbClr val="333333"/>
+                </a:solidFill>
+              </a:defRPr>
+            </a:pPr>
+            <a:r>
+              <a:t>5 == 3   # False</a:t>
+            </a:r>
+          </a:p>
+          <a:p>
+            <a:pPr>
+              <a:spcAft>
+                <a:spcPts val="600"/>
+              </a:spcAft>
+              <a:defRPr sz="1600">
+                <a:solidFill>
+                  <a:srgbClr val="333333"/>
+                </a:solidFill>
+              </a:defRPr>
+            </a:pPr>
+            <a:r>
+              <a:t>"hello" == "hello"  # True</a:t>
+            </a:r>
+          </a:p>
+          <a:p>
+            <a:pPr>
+              <a:spcAft>
+                <a:spcPts val="600"/>
+              </a:spcAft>
+              <a:defRPr b="1" sz="2000">
+                <a:solidFill>
+                  <a:srgbClr val="333333"/>
+                </a:solidFill>
+              </a:defRPr>
+            </a:pPr>
+            <a:r>
+              <a:t>Not equal to (!=):</a:t>
+            </a:r>
+          </a:p>
+          <a:p>
+            <a:pPr>
+              <a:spcAft>
+                <a:spcPts val="600"/>
+              </a:spcAft>
+              <a:defRPr sz="1600">
+                <a:solidFill>
+                  <a:srgbClr val="333333"/>
+                </a:solidFill>
+              </a:defRPr>
+            </a:pPr>
+            <a:r>
+              <a:t>5 != 3   # True</a:t>
+            </a:r>
+          </a:p>
+          <a:p>
+            <a:pPr>
+              <a:spcAft>
+                <a:spcPts val="600"/>
+              </a:spcAft>
+              <a:defRPr sz="1600">
+                <a:solidFill>
+                  <a:srgbClr val="333333"/>
+                </a:solidFill>
+              </a:defRPr>
+            </a:pPr>
+            <a:r>
+              <a:t>5 != 5   # False</a:t>
+            </a:r>
+          </a:p>
+          <a:p>
+            <a:pPr>
+              <a:spcAft>
+                <a:spcPts val="600"/>
+              </a:spcAft>
+              <a:defRPr b="1" sz="2000">
+                <a:solidFill>
+                  <a:srgbClr val="333333"/>
+                </a:solidFill>
+              </a:defRPr>
+            </a:pPr>
+            <a:r>
+              <a:t>Greater than (&gt;):</a:t>
+            </a:r>
+          </a:p>
+          <a:p>
+            <a:pPr>
+              <a:spcAft>
+                <a:spcPts val="600"/>
+              </a:spcAft>
+              <a:defRPr sz="1600">
+                <a:solidFill>
+                  <a:srgbClr val="333333"/>
+                </a:solidFill>
+              </a:defRPr>
+            </a:pPr>
+            <a:r>
+              <a:t>10 &gt; 5   # True</a:t>
+            </a:r>
+          </a:p>
+          <a:p>
+            <a:pPr>
+              <a:spcAft>
+                <a:spcPts val="600"/>
+              </a:spcAft>
+              <a:defRPr sz="1600">
+                <a:solidFill>
+                  <a:srgbClr val="333333"/>
+                </a:solidFill>
+              </a:defRPr>
+            </a:pPr>
+            <a:r>
+              <a:t>3 &gt; 10   # False</a:t>
+            </a:r>
+          </a:p>
+          <a:p>
+            <a:pPr>
+              <a:spcAft>
+                <a:spcPts val="600"/>
+              </a:spcAft>
+              <a:defRPr b="1" sz="2000">
+                <a:solidFill>
+                  <a:srgbClr val="333333"/>
+                </a:solidFill>
+              </a:defRPr>
+            </a:pPr>
+            <a:r>
+              <a:t>Less than (&lt;):</a:t>
+            </a:r>
+          </a:p>
+          <a:p>
+            <a:pPr>
+              <a:spcAft>
+                <a:spcPts val="600"/>
+              </a:spcAft>
+              <a:defRPr sz="1600">
+                <a:solidFill>
+                  <a:srgbClr val="333333"/>
+                </a:solidFill>
+              </a:defRPr>
+            </a:pPr>
+            <a:r>
+              <a:t>3 &lt; 10   # True</a:t>
+            </a:r>
+          </a:p>
+          <a:p>
+            <a:pPr>
+              <a:spcAft>
+                <a:spcPts val="600"/>
+              </a:spcAft>
+              <a:defRPr sz="1600">
+                <a:solidFill>
+                  <a:srgbClr val="333333"/>
+                </a:solidFill>
+              </a:defRPr>
+            </a:pPr>
+            <a:r>
+              <a:t>10 &lt; 5   # False</a:t>
+            </a:r>
+          </a:p>
+          <a:p>
+            <a:pPr>
+              <a:spcAft>
+                <a:spcPts val="600"/>
+              </a:spcAft>
+              <a:defRPr b="1" sz="2000">
+                <a:solidFill>
+                  <a:srgbClr val="333333"/>
+                </a:solidFill>
+              </a:defRPr>
+            </a:pPr>
+            <a:r>
+              <a:t>Greater than or equal (&gt;=):</a:t>
+            </a:r>
+          </a:p>
+          <a:p>
+            <a:pPr>
+              <a:spcAft>
+                <a:spcPts val="600"/>
+              </a:spcAft>
+              <a:defRPr sz="1600">
+                <a:solidFill>
+                  <a:srgbClr val="333333"/>
+                </a:solidFill>
+              </a:defRPr>
+            </a:pPr>
+            <a:r>
+              <a:t>10 &gt;= 10  # True</a:t>
+            </a:r>
+          </a:p>
+          <a:p>
+            <a:pPr>
+              <a:spcAft>
+                <a:spcPts val="600"/>
+              </a:spcAft>
+              <a:defRPr sz="1600">
+                <a:solidFill>
+                  <a:srgbClr val="333333"/>
+                </a:solidFill>
+              </a:defRPr>
+            </a:pPr>
+            <a:r>
+              <a:t>10 &gt;= 5   # True</a:t>
+            </a:r>
+          </a:p>
+          <a:p>
+            <a:pPr>
+              <a:spcAft>
+                <a:spcPts val="600"/>
+              </a:spcAft>
+              <a:defRPr b="1" sz="2000">
+                <a:solidFill>
+                  <a:srgbClr val="333333"/>
+                </a:solidFill>
+              </a:defRPr>
+            </a:pPr>
+            <a:r>
+              <a:t>Less than or equal (&lt;=):</a:t>
+            </a:r>
+          </a:p>
+          <a:p>
+            <a:pPr>
+              <a:spcAft>
+                <a:spcPts val="600"/>
+              </a:spcAft>
+              <a:defRPr sz="1600">
+                <a:solidFill>
+                  <a:srgbClr val="333333"/>
+                </a:solidFill>
+              </a:defRPr>
+            </a:pPr>
+            <a:r>
+              <a:t>5 &lt;= 10   # True</a:t>
+            </a:r>
+          </a:p>
+          <a:p>
+            <a:pPr>
+              <a:spcAft>
+                <a:spcPts val="600"/>
+              </a:spcAft>
+              <a:defRPr sz="1600">
+                <a:solidFill>
+                  <a:srgbClr val="333333"/>
+                </a:solidFill>
+              </a:defRPr>
+            </a:pPr>
+            <a:r>
+              <a:t>5 &lt;= 5    # True</a:t>
             </a:r>
           </a:p>
         </p:txBody>
@@ -5084,7 +6188,7 @@
 </p:sld>
 </file>
 
-<file path=ppt/slides/slide8.xml><?xml version="1.0" encoding="utf-8"?>
+<file path=ppt/slides/slide4.xml><?xml version="1.0" encoding="utf-8"?>
 <p:sld xmlns:a="http://schemas.openxmlformats.org/drawingml/2006/main" xmlns:p="http://schemas.openxmlformats.org/presentationml/2006/main" xmlns:r="http://schemas.openxmlformats.org/officeDocument/2006/relationships">
   <p:cSld>
     <p:spTree>
@@ -5188,8 +6292,8 @@
         </p:nvSpPr>
         <p:spPr>
           <a:xfrm>
-            <a:off x="457200" y="365760"/>
-            <a:ext cx="10972800" cy="731520"/>
+            <a:off x="457200" y="320040"/>
+            <a:ext cx="10972800" cy="640080"/>
           </a:xfrm>
           <a:prstGeom prst="rect">
             <a:avLst/>
@@ -5203,71 +6307,28 @@
           <a:lstStyle/>
           <a:p>
             <a:pPr>
-              <a:defRPr sz="4000" b="1">
+              <a:defRPr sz="3600" b="1">
                 <a:solidFill>
                   <a:srgbClr val="003366"/>
                 </a:solidFill>
               </a:defRPr>
             </a:pPr>
             <a:r>
-              <a:t>Logical Operators 🔗</a:t>
-            </a:r>
-          </a:p>
-        </p:txBody>
-      </p:sp>
-      <p:sp>
-        <p:nvSpPr>
-          <p:cNvPr id="5" name="Rectangle 4"/>
-          <p:cNvSpPr/>
+              <a:t>The if Statement</a:t>
+            </a:r>
+          </a:p>
+        </p:txBody>
+      </p:sp>
+      <p:sp>
+        <p:nvSpPr>
+          <p:cNvPr id="5" name="TextBox 4"/>
+          <p:cNvSpPr txBox="1"/>
           <p:nvPr/>
         </p:nvSpPr>
         <p:spPr>
           <a:xfrm>
-            <a:off x="457200" y="1005840"/>
-            <a:ext cx="1828800" cy="45720"/>
-          </a:xfrm>
-          <a:prstGeom prst="rect">
-            <a:avLst/>
-          </a:prstGeom>
-          <a:solidFill>
-            <a:srgbClr val="0066CC"/>
-          </a:solidFill>
-          <a:ln>
-            <a:noFill/>
-          </a:ln>
-        </p:spPr>
-        <p:style>
-          <a:lnRef idx="1">
-            <a:schemeClr val="accent1"/>
-          </a:lnRef>
-          <a:fillRef idx="3">
-            <a:schemeClr val="accent1"/>
-          </a:fillRef>
-          <a:effectRef idx="2">
-            <a:schemeClr val="accent1"/>
-          </a:effectRef>
-          <a:fontRef idx="minor">
-            <a:schemeClr val="lt1"/>
-          </a:fontRef>
-        </p:style>
-        <p:txBody>
-          <a:bodyPr rtlCol="0" anchor="ctr"/>
-          <a:lstStyle/>
-          <a:p>
-            <a:pPr algn="ctr"/>
-          </a:p>
-        </p:txBody>
-      </p:sp>
-      <p:sp>
-        <p:nvSpPr>
-          <p:cNvPr id="6" name="TextBox 5"/>
-          <p:cNvSpPr txBox="1"/>
-          <p:nvPr/>
-        </p:nvSpPr>
-        <p:spPr>
-          <a:xfrm>
-            <a:off x="640080" y="1371600"/>
-            <a:ext cx="10789920" cy="4572000"/>
+            <a:off x="640080" y="1188720"/>
+            <a:ext cx="10789920" cy="5303520"/>
           </a:xfrm>
           <a:prstGeom prst="rect">
             <a:avLst/>
@@ -5282,61 +6343,316 @@
           <a:p>
             <a:pPr>
               <a:spcAft>
-                <a:spcPts val="800"/>
-              </a:spcAft>
-              <a:defRPr sz="2000" b="1">
-                <a:solidFill>
-                  <a:srgbClr val="333333"/>
-                </a:solidFill>
-              </a:defRPr>
-            </a:pPr>
-            <a:r>
-              <a:t>Combine multiple conditions</a:t>
-            </a:r>
-          </a:p>
-          <a:p>
-            <a:pPr>
-              <a:spcAft>
-                <a:spcPts val="800"/>
-              </a:spcAft>
-              <a:defRPr sz="2000" b="1">
-                <a:solidFill>
-                  <a:srgbClr val="333333"/>
-                </a:solidFill>
-              </a:defRPr>
-            </a:pPr>
-            <a:r>
-              <a:t>and (Both must be True)</a:t>
-            </a:r>
-          </a:p>
-          <a:p>
-            <a:pPr>
-              <a:spcAft>
-                <a:spcPts val="800"/>
-              </a:spcAft>
-              <a:defRPr sz="2000" b="1">
-                <a:solidFill>
-                  <a:srgbClr val="333333"/>
-                </a:solidFill>
-              </a:defRPr>
-            </a:pPr>
-            <a:r>
-              <a:t>or (At least one must be True)</a:t>
-            </a:r>
-          </a:p>
-          <a:p>
-            <a:pPr>
-              <a:spcAft>
-                <a:spcPts val="800"/>
-              </a:spcAft>
-              <a:defRPr sz="2000" b="1">
-                <a:solidFill>
-                  <a:srgbClr val="333333"/>
-                </a:solidFill>
-              </a:defRPr>
-            </a:pPr>
-            <a:r>
-              <a:t>not (Reverses the value)</a:t>
+                <a:spcPts val="600"/>
+              </a:spcAft>
+              <a:defRPr b="1" sz="2000">
+                <a:solidFill>
+                  <a:srgbClr val="333333"/>
+                </a:solidFill>
+              </a:defRPr>
+            </a:pPr>
+            <a:r>
+              <a:t>Basic if Statement:</a:t>
+            </a:r>
+          </a:p>
+          <a:p>
+            <a:pPr>
+              <a:spcAft>
+                <a:spcPts val="600"/>
+              </a:spcAft>
+              <a:defRPr b="1" sz="2000">
+                <a:solidFill>
+                  <a:srgbClr val="333333"/>
+                </a:solidFill>
+              </a:defRPr>
+            </a:pPr>
+            <a:r>
+              <a:t>if condition:</a:t>
+            </a:r>
+          </a:p>
+          <a:p>
+            <a:pPr>
+              <a:spcAft>
+                <a:spcPts val="600"/>
+              </a:spcAft>
+              <a:defRPr sz="1600">
+                <a:solidFill>
+                  <a:srgbClr val="333333"/>
+                </a:solidFill>
+              </a:defRPr>
+            </a:pPr>
+            <a:r>
+              <a:t>    # code runs if condition is True</a:t>
+            </a:r>
+          </a:p>
+          <a:p>
+            <a:pPr>
+              <a:spcAft>
+                <a:spcPts val="600"/>
+              </a:spcAft>
+              <a:defRPr b="1" sz="2000">
+                <a:solidFill>
+                  <a:srgbClr val="333333"/>
+                </a:solidFill>
+              </a:defRPr>
+            </a:pPr>
+            <a:r>
+              <a:t>Example:</a:t>
+            </a:r>
+          </a:p>
+          <a:p>
+            <a:pPr>
+              <a:spcAft>
+                <a:spcPts val="600"/>
+              </a:spcAft>
+              <a:defRPr sz="1600">
+                <a:solidFill>
+                  <a:srgbClr val="333333"/>
+                </a:solidFill>
+              </a:defRPr>
+            </a:pPr>
+            <a:r>
+              <a:t>age = 20</a:t>
+            </a:r>
+          </a:p>
+          <a:p>
+            <a:pPr>
+              <a:spcAft>
+                <a:spcPts val="600"/>
+              </a:spcAft>
+              <a:defRPr b="1" sz="2000">
+                <a:solidFill>
+                  <a:srgbClr val="333333"/>
+                </a:solidFill>
+              </a:defRPr>
+            </a:pPr>
+            <a:r>
+              <a:t>if age &gt;= 18:</a:t>
+            </a:r>
+          </a:p>
+          <a:p>
+            <a:pPr>
+              <a:spcAft>
+                <a:spcPts val="600"/>
+              </a:spcAft>
+              <a:defRPr sz="1600">
+                <a:solidFill>
+                  <a:srgbClr val="333333"/>
+                </a:solidFill>
+              </a:defRPr>
+            </a:pPr>
+            <a:r>
+              <a:t>    print("You can vote")</a:t>
+            </a:r>
+          </a:p>
+          <a:p>
+            <a:pPr>
+              <a:spcAft>
+                <a:spcPts val="600"/>
+              </a:spcAft>
+              <a:defRPr b="1" sz="2000">
+                <a:solidFill>
+                  <a:srgbClr val="333333"/>
+                </a:solidFill>
+              </a:defRPr>
+            </a:pPr>
+            <a:r>
+              <a:t>Important: Indentation Matters</a:t>
+            </a:r>
+          </a:p>
+          <a:p>
+            <a:pPr lvl="1">
+              <a:spcAft>
+                <a:spcPts val="400"/>
+              </a:spcAft>
+              <a:defRPr sz="1600">
+                <a:solidFill>
+                  <a:srgbClr val="333333"/>
+                </a:solidFill>
+              </a:defRPr>
+            </a:pPr>
+            <a:r>
+              <a:t>• Use 4 spaces for indentation</a:t>
+            </a:r>
+          </a:p>
+          <a:p>
+            <a:pPr lvl="1">
+              <a:spcAft>
+                <a:spcPts val="400"/>
+              </a:spcAft>
+              <a:defRPr sz="1600">
+                <a:solidFill>
+                  <a:srgbClr val="333333"/>
+                </a:solidFill>
+              </a:defRPr>
+            </a:pPr>
+            <a:r>
+              <a:t>• All code in the block must be indented</a:t>
+            </a:r>
+          </a:p>
+          <a:p>
+            <a:pPr lvl="1">
+              <a:spcAft>
+                <a:spcPts val="400"/>
+              </a:spcAft>
+              <a:defRPr sz="1600">
+                <a:solidFill>
+                  <a:srgbClr val="333333"/>
+                </a:solidFill>
+              </a:defRPr>
+            </a:pPr>
+            <a:r>
+              <a:t>• Inconsistent indentation causes errors</a:t>
+            </a:r>
+          </a:p>
+          <a:p>
+            <a:pPr>
+              <a:spcAft>
+                <a:spcPts val="600"/>
+              </a:spcAft>
+              <a:defRPr b="1" sz="2000">
+                <a:solidFill>
+                  <a:srgbClr val="333333"/>
+                </a:solidFill>
+              </a:defRPr>
+            </a:pPr>
+            <a:r>
+              <a:t>Multiple Statements:</a:t>
+            </a:r>
+          </a:p>
+          <a:p>
+            <a:pPr>
+              <a:spcAft>
+                <a:spcPts val="600"/>
+              </a:spcAft>
+              <a:defRPr b="1" sz="2000">
+                <a:solidFill>
+                  <a:srgbClr val="333333"/>
+                </a:solidFill>
+              </a:defRPr>
+            </a:pPr>
+            <a:r>
+              <a:t>if age &gt;= 18:</a:t>
+            </a:r>
+          </a:p>
+          <a:p>
+            <a:pPr>
+              <a:spcAft>
+                <a:spcPts val="600"/>
+              </a:spcAft>
+              <a:defRPr sz="1600">
+                <a:solidFill>
+                  <a:srgbClr val="333333"/>
+                </a:solidFill>
+              </a:defRPr>
+            </a:pPr>
+            <a:r>
+              <a:t>    print("You are an adult")</a:t>
+            </a:r>
+          </a:p>
+          <a:p>
+            <a:pPr>
+              <a:spcAft>
+                <a:spcPts val="600"/>
+              </a:spcAft>
+              <a:defRPr sz="1600">
+                <a:solidFill>
+                  <a:srgbClr val="333333"/>
+                </a:solidFill>
+              </a:defRPr>
+            </a:pPr>
+            <a:r>
+              <a:t>    print("You have full rights")</a:t>
+            </a:r>
+          </a:p>
+          <a:p>
+            <a:pPr>
+              <a:spcAft>
+                <a:spcPts val="600"/>
+              </a:spcAft>
+              <a:defRPr sz="1600">
+                <a:solidFill>
+                  <a:srgbClr val="333333"/>
+                </a:solidFill>
+              </a:defRPr>
+            </a:pPr>
+            <a:r>
+              <a:t>    print("You can vote")</a:t>
+            </a:r>
+          </a:p>
+          <a:p>
+            <a:pPr>
+              <a:spcAft>
+                <a:spcPts val="600"/>
+              </a:spcAft>
+              <a:defRPr b="1" sz="2000">
+                <a:solidFill>
+                  <a:srgbClr val="333333"/>
+                </a:solidFill>
+              </a:defRPr>
+            </a:pPr>
+            <a:r>
+              <a:t>if Statement Flow:</a:t>
+            </a:r>
+          </a:p>
+          <a:p>
+            <a:pPr>
+              <a:spcAft>
+                <a:spcPts val="600"/>
+              </a:spcAft>
+              <a:defRPr sz="1600">
+                <a:solidFill>
+                  <a:srgbClr val="333333"/>
+                </a:solidFill>
+              </a:defRPr>
+            </a:pPr>
+            <a:r>
+              <a:t>1. Evaluate condition</a:t>
+            </a:r>
+          </a:p>
+          <a:p>
+            <a:pPr>
+              <a:spcAft>
+                <a:spcPts val="600"/>
+              </a:spcAft>
+              <a:defRPr sz="1600">
+                <a:solidFill>
+                  <a:srgbClr val="333333"/>
+                </a:solidFill>
+              </a:defRPr>
+            </a:pPr>
+            <a:r>
+              <a:t>2. If True, execute indented code</a:t>
+            </a:r>
+          </a:p>
+          <a:p>
+            <a:pPr>
+              <a:spcAft>
+                <a:spcPts val="600"/>
+              </a:spcAft>
+              <a:defRPr sz="1600">
+                <a:solidFill>
+                  <a:srgbClr val="333333"/>
+                </a:solidFill>
+              </a:defRPr>
+            </a:pPr>
+            <a:r>
+              <a:t>3. If False, skip indented code</a:t>
+            </a:r>
+          </a:p>
+          <a:p>
+            <a:pPr>
+              <a:spcAft>
+                <a:spcPts val="600"/>
+              </a:spcAft>
+              <a:defRPr sz="1600">
+                <a:solidFill>
+                  <a:srgbClr val="333333"/>
+                </a:solidFill>
+              </a:defRPr>
+            </a:pPr>
+            <a:r>
+              <a:t>4. Continue with rest of program</a:t>
             </a:r>
           </a:p>
         </p:txBody>
@@ -5349,7 +6665,7 @@
 </p:sld>
 </file>
 
-<file path=ppt/slides/slide9.xml><?xml version="1.0" encoding="utf-8"?>
+<file path=ppt/slides/slide5.xml><?xml version="1.0" encoding="utf-8"?>
 <p:sld xmlns:a="http://schemas.openxmlformats.org/drawingml/2006/main" xmlns:p="http://schemas.openxmlformats.org/presentationml/2006/main" xmlns:r="http://schemas.openxmlformats.org/officeDocument/2006/relationships">
   <p:cSld>
     <p:spTree>
@@ -5453,8 +6769,8 @@
         </p:nvSpPr>
         <p:spPr>
           <a:xfrm>
-            <a:off x="457200" y="365760"/>
-            <a:ext cx="10972800" cy="731520"/>
+            <a:off x="457200" y="320040"/>
+            <a:ext cx="10972800" cy="640080"/>
           </a:xfrm>
           <a:prstGeom prst="rect">
             <a:avLst/>
@@ -5468,28 +6784,472 @@
           <a:lstStyle/>
           <a:p>
             <a:pPr>
-              <a:defRPr sz="4000" b="1">
+              <a:defRPr sz="3600" b="1">
                 <a:solidFill>
                   <a:srgbClr val="003366"/>
                 </a:solidFill>
               </a:defRPr>
             </a:pPr>
             <a:r>
-              <a:t>Real-World Example 🎫</a:t>
-            </a:r>
-          </a:p>
-        </p:txBody>
-      </p:sp>
-      <p:sp>
-        <p:nvSpPr>
-          <p:cNvPr id="5" name="Rectangle 4"/>
+              <a:t>The if-else Statement</a:t>
+            </a:r>
+          </a:p>
+        </p:txBody>
+      </p:sp>
+      <p:sp>
+        <p:nvSpPr>
+          <p:cNvPr id="5" name="TextBox 4"/>
+          <p:cNvSpPr txBox="1"/>
+          <p:nvPr/>
+        </p:nvSpPr>
+        <p:spPr>
+          <a:xfrm>
+            <a:off x="640080" y="1188720"/>
+            <a:ext cx="10789920" cy="5303520"/>
+          </a:xfrm>
+          <a:prstGeom prst="rect">
+            <a:avLst/>
+          </a:prstGeom>
+          <a:noFill/>
+        </p:spPr>
+        <p:txBody>
+          <a:bodyPr wrap="square">
+            <a:spAutoFit/>
+          </a:bodyPr>
+          <a:lstStyle/>
+          <a:p>
+            <a:pPr>
+              <a:spcAft>
+                <a:spcPts val="600"/>
+              </a:spcAft>
+              <a:defRPr b="1" sz="2000">
+                <a:solidFill>
+                  <a:srgbClr val="333333"/>
+                </a:solidFill>
+              </a:defRPr>
+            </a:pPr>
+            <a:r>
+              <a:t>if-else Structure:</a:t>
+            </a:r>
+          </a:p>
+          <a:p>
+            <a:pPr>
+              <a:spcAft>
+                <a:spcPts val="600"/>
+              </a:spcAft>
+              <a:defRPr b="1" sz="2000">
+                <a:solidFill>
+                  <a:srgbClr val="333333"/>
+                </a:solidFill>
+              </a:defRPr>
+            </a:pPr>
+            <a:r>
+              <a:t>if condition:</a:t>
+            </a:r>
+          </a:p>
+          <a:p>
+            <a:pPr>
+              <a:spcAft>
+                <a:spcPts val="600"/>
+              </a:spcAft>
+              <a:defRPr sz="1600">
+                <a:solidFill>
+                  <a:srgbClr val="333333"/>
+                </a:solidFill>
+              </a:defRPr>
+            </a:pPr>
+            <a:r>
+              <a:t>    # runs if True</a:t>
+            </a:r>
+          </a:p>
+          <a:p>
+            <a:pPr>
+              <a:spcAft>
+                <a:spcPts val="600"/>
+              </a:spcAft>
+              <a:defRPr b="1" sz="2000">
+                <a:solidFill>
+                  <a:srgbClr val="333333"/>
+                </a:solidFill>
+              </a:defRPr>
+            </a:pPr>
+            <a:r>
+              <a:t>else:</a:t>
+            </a:r>
+          </a:p>
+          <a:p>
+            <a:pPr>
+              <a:spcAft>
+                <a:spcPts val="600"/>
+              </a:spcAft>
+              <a:defRPr sz="1600">
+                <a:solidFill>
+                  <a:srgbClr val="333333"/>
+                </a:solidFill>
+              </a:defRPr>
+            </a:pPr>
+            <a:r>
+              <a:t>    # runs if False</a:t>
+            </a:r>
+          </a:p>
+          <a:p>
+            <a:pPr>
+              <a:spcAft>
+                <a:spcPts val="600"/>
+              </a:spcAft>
+              <a:defRPr b="1" sz="2000">
+                <a:solidFill>
+                  <a:srgbClr val="333333"/>
+                </a:solidFill>
+              </a:defRPr>
+            </a:pPr>
+            <a:r>
+              <a:t>Example:</a:t>
+            </a:r>
+          </a:p>
+          <a:p>
+            <a:pPr>
+              <a:spcAft>
+                <a:spcPts val="600"/>
+              </a:spcAft>
+              <a:defRPr sz="1600">
+                <a:solidFill>
+                  <a:srgbClr val="333333"/>
+                </a:solidFill>
+              </a:defRPr>
+            </a:pPr>
+            <a:r>
+              <a:t>age = 15</a:t>
+            </a:r>
+          </a:p>
+          <a:p>
+            <a:pPr>
+              <a:spcAft>
+                <a:spcPts val="600"/>
+              </a:spcAft>
+              <a:defRPr b="1" sz="2000">
+                <a:solidFill>
+                  <a:srgbClr val="333333"/>
+                </a:solidFill>
+              </a:defRPr>
+            </a:pPr>
+            <a:r>
+              <a:t>if age &gt;= 18:</a:t>
+            </a:r>
+          </a:p>
+          <a:p>
+            <a:pPr>
+              <a:spcAft>
+                <a:spcPts val="600"/>
+              </a:spcAft>
+              <a:defRPr sz="1600">
+                <a:solidFill>
+                  <a:srgbClr val="333333"/>
+                </a:solidFill>
+              </a:defRPr>
+            </a:pPr>
+            <a:r>
+              <a:t>    print("Adult")</a:t>
+            </a:r>
+          </a:p>
+          <a:p>
+            <a:pPr>
+              <a:spcAft>
+                <a:spcPts val="600"/>
+              </a:spcAft>
+              <a:defRPr b="1" sz="2000">
+                <a:solidFill>
+                  <a:srgbClr val="333333"/>
+                </a:solidFill>
+              </a:defRPr>
+            </a:pPr>
+            <a:r>
+              <a:t>else:</a:t>
+            </a:r>
+          </a:p>
+          <a:p>
+            <a:pPr>
+              <a:spcAft>
+                <a:spcPts val="600"/>
+              </a:spcAft>
+              <a:defRPr sz="1600">
+                <a:solidFill>
+                  <a:srgbClr val="333333"/>
+                </a:solidFill>
+              </a:defRPr>
+            </a:pPr>
+            <a:r>
+              <a:t>    print("Minor")</a:t>
+            </a:r>
+          </a:p>
+          <a:p>
+            <a:pPr>
+              <a:spcAft>
+                <a:spcPts val="600"/>
+              </a:spcAft>
+              <a:defRPr b="1" sz="2000">
+                <a:solidFill>
+                  <a:srgbClr val="333333"/>
+                </a:solidFill>
+              </a:defRPr>
+            </a:pPr>
+            <a:r>
+              <a:t>Practical Example: Login Check</a:t>
+            </a:r>
+          </a:p>
+          <a:p>
+            <a:pPr>
+              <a:spcAft>
+                <a:spcPts val="600"/>
+              </a:spcAft>
+              <a:defRPr b="1" sz="2000">
+                <a:solidFill>
+                  <a:srgbClr val="333333"/>
+                </a:solidFill>
+              </a:defRPr>
+            </a:pPr>
+            <a:r>
+              <a:t>password = input("Enter password: ")</a:t>
+            </a:r>
+          </a:p>
+          <a:p>
+            <a:pPr>
+              <a:spcAft>
+                <a:spcPts val="600"/>
+              </a:spcAft>
+              <a:defRPr b="1" sz="2000">
+                <a:solidFill>
+                  <a:srgbClr val="333333"/>
+                </a:solidFill>
+              </a:defRPr>
+            </a:pPr>
+            <a:r>
+              <a:t>if password == "secret123":</a:t>
+            </a:r>
+          </a:p>
+          <a:p>
+            <a:pPr>
+              <a:spcAft>
+                <a:spcPts val="600"/>
+              </a:spcAft>
+              <a:defRPr sz="1600">
+                <a:solidFill>
+                  <a:srgbClr val="333333"/>
+                </a:solidFill>
+              </a:defRPr>
+            </a:pPr>
+            <a:r>
+              <a:t>    print("Access granted")</a:t>
+            </a:r>
+          </a:p>
+          <a:p>
+            <a:pPr>
+              <a:spcAft>
+                <a:spcPts val="600"/>
+              </a:spcAft>
+              <a:defRPr b="1" sz="2000">
+                <a:solidFill>
+                  <a:srgbClr val="333333"/>
+                </a:solidFill>
+              </a:defRPr>
+            </a:pPr>
+            <a:r>
+              <a:t>else:</a:t>
+            </a:r>
+          </a:p>
+          <a:p>
+            <a:pPr>
+              <a:spcAft>
+                <a:spcPts val="600"/>
+              </a:spcAft>
+              <a:defRPr sz="1600">
+                <a:solidFill>
+                  <a:srgbClr val="333333"/>
+                </a:solidFill>
+              </a:defRPr>
+            </a:pPr>
+            <a:r>
+              <a:t>    print("Access denied")</a:t>
+            </a:r>
+          </a:p>
+          <a:p>
+            <a:pPr>
+              <a:spcAft>
+                <a:spcPts val="600"/>
+              </a:spcAft>
+              <a:defRPr b="1" sz="2000">
+                <a:solidFill>
+                  <a:srgbClr val="333333"/>
+                </a:solidFill>
+              </a:defRPr>
+            </a:pPr>
+            <a:r>
+              <a:t>When to Use:</a:t>
+            </a:r>
+          </a:p>
+          <a:p>
+            <a:pPr lvl="1">
+              <a:spcAft>
+                <a:spcPts val="400"/>
+              </a:spcAft>
+              <a:defRPr sz="1600">
+                <a:solidFill>
+                  <a:srgbClr val="333333"/>
+                </a:solidFill>
+              </a:defRPr>
+            </a:pPr>
+            <a:r>
+              <a:t>• Two mutually exclusive outcomes</a:t>
+            </a:r>
+          </a:p>
+          <a:p>
+            <a:pPr lvl="1">
+              <a:spcAft>
+                <a:spcPts val="400"/>
+              </a:spcAft>
+              <a:defRPr sz="1600">
+                <a:solidFill>
+                  <a:srgbClr val="333333"/>
+                </a:solidFill>
+              </a:defRPr>
+            </a:pPr>
+            <a:r>
+              <a:t>• Either one path or the other</a:t>
+            </a:r>
+          </a:p>
+          <a:p>
+            <a:pPr lvl="1">
+              <a:spcAft>
+                <a:spcPts val="400"/>
+              </a:spcAft>
+              <a:defRPr sz="1600">
+                <a:solidFill>
+                  <a:srgbClr val="333333"/>
+                </a:solidFill>
+              </a:defRPr>
+            </a:pPr>
+            <a:r>
+              <a:t>• Never both</a:t>
+            </a:r>
+          </a:p>
+          <a:p>
+            <a:pPr>
+              <a:spcAft>
+                <a:spcPts val="600"/>
+              </a:spcAft>
+              <a:defRPr b="1" sz="2000">
+                <a:solidFill>
+                  <a:srgbClr val="333333"/>
+                </a:solidFill>
+              </a:defRPr>
+            </a:pPr>
+            <a:r>
+              <a:t>Flow:</a:t>
+            </a:r>
+          </a:p>
+          <a:p>
+            <a:pPr lvl="1">
+              <a:spcAft>
+                <a:spcPts val="400"/>
+              </a:spcAft>
+              <a:defRPr sz="1600">
+                <a:solidFill>
+                  <a:srgbClr val="333333"/>
+                </a:solidFill>
+              </a:defRPr>
+            </a:pPr>
+            <a:r>
+              <a:t>• Condition True → if block runs</a:t>
+            </a:r>
+          </a:p>
+          <a:p>
+            <a:pPr lvl="1">
+              <a:spcAft>
+                <a:spcPts val="400"/>
+              </a:spcAft>
+              <a:defRPr sz="1600">
+                <a:solidFill>
+                  <a:srgbClr val="333333"/>
+                </a:solidFill>
+              </a:defRPr>
+            </a:pPr>
+            <a:r>
+              <a:t>• Condition False → else block runs</a:t>
+            </a:r>
+          </a:p>
+        </p:txBody>
+      </p:sp>
+    </p:spTree>
+  </p:cSld>
+  <p:clrMapOvr>
+    <a:masterClrMapping/>
+  </p:clrMapOvr>
+</p:sld>
+</file>
+
+<file path=ppt/slides/slide6.xml><?xml version="1.0" encoding="utf-8"?>
+<p:sld xmlns:a="http://schemas.openxmlformats.org/drawingml/2006/main" xmlns:p="http://schemas.openxmlformats.org/presentationml/2006/main" xmlns:r="http://schemas.openxmlformats.org/officeDocument/2006/relationships">
+  <p:cSld>
+    <p:spTree>
+      <p:nvGrpSpPr>
+        <p:cNvPr id="1" name=""/>
+        <p:cNvGrpSpPr/>
+        <p:nvPr/>
+      </p:nvGrpSpPr>
+      <p:grpSpPr/>
+      <p:sp>
+        <p:nvSpPr>
+          <p:cNvPr id="2" name="Rectangle 1"/>
           <p:cNvSpPr/>
           <p:nvPr/>
         </p:nvSpPr>
         <p:spPr>
           <a:xfrm>
-            <a:off x="457200" y="1005840"/>
-            <a:ext cx="1828800" cy="45720"/>
+            <a:off x="0" y="0"/>
+            <a:ext cx="12191695" cy="6858000"/>
+          </a:xfrm>
+          <a:prstGeom prst="rect">
+            <a:avLst/>
+          </a:prstGeom>
+          <a:solidFill>
+            <a:srgbClr val="FFFFFF"/>
+          </a:solidFill>
+          <a:ln>
+            <a:noFill/>
+          </a:ln>
+        </p:spPr>
+        <p:style>
+          <a:lnRef idx="1">
+            <a:schemeClr val="accent1"/>
+          </a:lnRef>
+          <a:fillRef idx="3">
+            <a:schemeClr val="accent1"/>
+          </a:fillRef>
+          <a:effectRef idx="2">
+            <a:schemeClr val="accent1"/>
+          </a:effectRef>
+          <a:fontRef idx="minor">
+            <a:schemeClr val="lt1"/>
+          </a:fontRef>
+        </p:style>
+        <p:txBody>
+          <a:bodyPr rtlCol="0" anchor="ctr"/>
+          <a:lstStyle/>
+          <a:p>
+            <a:pPr algn="ctr"/>
+          </a:p>
+        </p:txBody>
+      </p:sp>
+      <p:sp>
+        <p:nvSpPr>
+          <p:cNvPr id="3" name="Rectangle 2"/>
+          <p:cNvSpPr/>
+          <p:nvPr/>
+        </p:nvSpPr>
+        <p:spPr>
+          <a:xfrm>
+            <a:off x="0" y="0"/>
+            <a:ext cx="12191695" cy="137160"/>
           </a:xfrm>
           <a:prstGeom prst="rect">
             <a:avLst/>
@@ -5525,14 +7285,14 @@
       </p:sp>
       <p:sp>
         <p:nvSpPr>
-          <p:cNvPr id="6" name="TextBox 5"/>
+          <p:cNvPr id="4" name="TextBox 3"/>
           <p:cNvSpPr txBox="1"/>
           <p:nvPr/>
         </p:nvSpPr>
         <p:spPr>
           <a:xfrm>
-            <a:off x="640080" y="1371600"/>
-            <a:ext cx="10789920" cy="4572000"/>
+            <a:off x="457200" y="320040"/>
+            <a:ext cx="10972800" cy="640080"/>
           </a:xfrm>
           <a:prstGeom prst="rect">
             <a:avLst/>
@@ -5540,6 +7300,41 @@
           <a:noFill/>
         </p:spPr>
         <p:txBody>
+          <a:bodyPr wrap="none">
+            <a:spAutoFit/>
+          </a:bodyPr>
+          <a:lstStyle/>
+          <a:p>
+            <a:pPr>
+              <a:defRPr sz="3600" b="1">
+                <a:solidFill>
+                  <a:srgbClr val="003366"/>
+                </a:solidFill>
+              </a:defRPr>
+            </a:pPr>
+            <a:r>
+              <a:t>The if-elif-else Statement</a:t>
+            </a:r>
+          </a:p>
+        </p:txBody>
+      </p:sp>
+      <p:sp>
+        <p:nvSpPr>
+          <p:cNvPr id="5" name="TextBox 4"/>
+          <p:cNvSpPr txBox="1"/>
+          <p:nvPr/>
+        </p:nvSpPr>
+        <p:spPr>
+          <a:xfrm>
+            <a:off x="640080" y="1188720"/>
+            <a:ext cx="10789920" cy="5303520"/>
+          </a:xfrm>
+          <a:prstGeom prst="rect">
+            <a:avLst/>
+          </a:prstGeom>
+          <a:noFill/>
+        </p:spPr>
+        <p:txBody>
           <a:bodyPr wrap="square">
             <a:spAutoFit/>
           </a:bodyPr>
@@ -5547,16 +7342,1897 @@
           <a:p>
             <a:pPr>
               <a:spcAft>
-                <a:spcPts val="800"/>
-              </a:spcAft>
-              <a:defRPr sz="2000" b="1">
-                <a:solidFill>
-                  <a:srgbClr val="333333"/>
-                </a:solidFill>
-              </a:defRPr>
-            </a:pPr>
-            <a:r>
-              <a:t>Movie Ticket Pricing</a:t>
+                <a:spcPts val="600"/>
+              </a:spcAft>
+              <a:defRPr b="1" sz="2000">
+                <a:solidFill>
+                  <a:srgbClr val="333333"/>
+                </a:solidFill>
+              </a:defRPr>
+            </a:pPr>
+            <a:r>
+              <a:t>Multiple Conditions:</a:t>
+            </a:r>
+          </a:p>
+          <a:p>
+            <a:pPr>
+              <a:spcAft>
+                <a:spcPts val="600"/>
+              </a:spcAft>
+              <a:defRPr b="1" sz="2000">
+                <a:solidFill>
+                  <a:srgbClr val="333333"/>
+                </a:solidFill>
+              </a:defRPr>
+            </a:pPr>
+            <a:r>
+              <a:t>if condition1:</a:t>
+            </a:r>
+          </a:p>
+          <a:p>
+            <a:pPr>
+              <a:spcAft>
+                <a:spcPts val="600"/>
+              </a:spcAft>
+              <a:defRPr sz="1600">
+                <a:solidFill>
+                  <a:srgbClr val="333333"/>
+                </a:solidFill>
+              </a:defRPr>
+            </a:pPr>
+            <a:r>
+              <a:t>    # runs if condition1 is True</a:t>
+            </a:r>
+          </a:p>
+          <a:p>
+            <a:pPr>
+              <a:spcAft>
+                <a:spcPts val="600"/>
+              </a:spcAft>
+              <a:defRPr b="1" sz="2000">
+                <a:solidFill>
+                  <a:srgbClr val="333333"/>
+                </a:solidFill>
+              </a:defRPr>
+            </a:pPr>
+            <a:r>
+              <a:t>elif condition2:</a:t>
+            </a:r>
+          </a:p>
+          <a:p>
+            <a:pPr>
+              <a:spcAft>
+                <a:spcPts val="600"/>
+              </a:spcAft>
+              <a:defRPr sz="1600">
+                <a:solidFill>
+                  <a:srgbClr val="333333"/>
+                </a:solidFill>
+              </a:defRPr>
+            </a:pPr>
+            <a:r>
+              <a:t>    # runs if condition2 is True</a:t>
+            </a:r>
+          </a:p>
+          <a:p>
+            <a:pPr>
+              <a:spcAft>
+                <a:spcPts val="600"/>
+              </a:spcAft>
+              <a:defRPr b="1" sz="2000">
+                <a:solidFill>
+                  <a:srgbClr val="333333"/>
+                </a:solidFill>
+              </a:defRPr>
+            </a:pPr>
+            <a:r>
+              <a:t>elif condition3:</a:t>
+            </a:r>
+          </a:p>
+          <a:p>
+            <a:pPr>
+              <a:spcAft>
+                <a:spcPts val="600"/>
+              </a:spcAft>
+              <a:defRPr sz="1600">
+                <a:solidFill>
+                  <a:srgbClr val="333333"/>
+                </a:solidFill>
+              </a:defRPr>
+            </a:pPr>
+            <a:r>
+              <a:t>    # runs if condition3 is True</a:t>
+            </a:r>
+          </a:p>
+          <a:p>
+            <a:pPr>
+              <a:spcAft>
+                <a:spcPts val="600"/>
+              </a:spcAft>
+              <a:defRPr b="1" sz="2000">
+                <a:solidFill>
+                  <a:srgbClr val="333333"/>
+                </a:solidFill>
+              </a:defRPr>
+            </a:pPr>
+            <a:r>
+              <a:t>else:</a:t>
+            </a:r>
+          </a:p>
+          <a:p>
+            <a:pPr>
+              <a:spcAft>
+                <a:spcPts val="600"/>
+              </a:spcAft>
+              <a:defRPr sz="1600">
+                <a:solidFill>
+                  <a:srgbClr val="333333"/>
+                </a:solidFill>
+              </a:defRPr>
+            </a:pPr>
+            <a:r>
+              <a:t>    # runs if all conditions are False</a:t>
+            </a:r>
+          </a:p>
+          <a:p>
+            <a:pPr>
+              <a:spcAft>
+                <a:spcPts val="600"/>
+              </a:spcAft>
+              <a:defRPr b="1" sz="2000">
+                <a:solidFill>
+                  <a:srgbClr val="333333"/>
+                </a:solidFill>
+              </a:defRPr>
+            </a:pPr>
+            <a:r>
+              <a:t>Example: Grade System</a:t>
+            </a:r>
+          </a:p>
+          <a:p>
+            <a:pPr>
+              <a:spcAft>
+                <a:spcPts val="600"/>
+              </a:spcAft>
+              <a:defRPr sz="1600">
+                <a:solidFill>
+                  <a:srgbClr val="333333"/>
+                </a:solidFill>
+              </a:defRPr>
+            </a:pPr>
+            <a:r>
+              <a:t>score = 85</a:t>
+            </a:r>
+          </a:p>
+          <a:p>
+            <a:pPr>
+              <a:spcAft>
+                <a:spcPts val="600"/>
+              </a:spcAft>
+              <a:defRPr b="1" sz="2000">
+                <a:solidFill>
+                  <a:srgbClr val="333333"/>
+                </a:solidFill>
+              </a:defRPr>
+            </a:pPr>
+            <a:r>
+              <a:t>if score &gt;= 90:</a:t>
+            </a:r>
+          </a:p>
+          <a:p>
+            <a:pPr>
+              <a:spcAft>
+                <a:spcPts val="600"/>
+              </a:spcAft>
+              <a:defRPr sz="1600">
+                <a:solidFill>
+                  <a:srgbClr val="333333"/>
+                </a:solidFill>
+              </a:defRPr>
+            </a:pPr>
+            <a:r>
+              <a:t>    grade = "A"</a:t>
+            </a:r>
+          </a:p>
+          <a:p>
+            <a:pPr>
+              <a:spcAft>
+                <a:spcPts val="600"/>
+              </a:spcAft>
+              <a:defRPr b="1" sz="2000">
+                <a:solidFill>
+                  <a:srgbClr val="333333"/>
+                </a:solidFill>
+              </a:defRPr>
+            </a:pPr>
+            <a:r>
+              <a:t>elif score &gt;= 80:</a:t>
+            </a:r>
+          </a:p>
+          <a:p>
+            <a:pPr>
+              <a:spcAft>
+                <a:spcPts val="600"/>
+              </a:spcAft>
+              <a:defRPr sz="1600">
+                <a:solidFill>
+                  <a:srgbClr val="333333"/>
+                </a:solidFill>
+              </a:defRPr>
+            </a:pPr>
+            <a:r>
+              <a:t>    grade = "B"</a:t>
+            </a:r>
+          </a:p>
+          <a:p>
+            <a:pPr>
+              <a:spcAft>
+                <a:spcPts val="600"/>
+              </a:spcAft>
+              <a:defRPr b="1" sz="2000">
+                <a:solidFill>
+                  <a:srgbClr val="333333"/>
+                </a:solidFill>
+              </a:defRPr>
+            </a:pPr>
+            <a:r>
+              <a:t>elif score &gt;= 70:</a:t>
+            </a:r>
+          </a:p>
+          <a:p>
+            <a:pPr>
+              <a:spcAft>
+                <a:spcPts val="600"/>
+              </a:spcAft>
+              <a:defRPr sz="1600">
+                <a:solidFill>
+                  <a:srgbClr val="333333"/>
+                </a:solidFill>
+              </a:defRPr>
+            </a:pPr>
+            <a:r>
+              <a:t>    grade = "C"</a:t>
+            </a:r>
+          </a:p>
+          <a:p>
+            <a:pPr>
+              <a:spcAft>
+                <a:spcPts val="600"/>
+              </a:spcAft>
+              <a:defRPr b="1" sz="2000">
+                <a:solidFill>
+                  <a:srgbClr val="333333"/>
+                </a:solidFill>
+              </a:defRPr>
+            </a:pPr>
+            <a:r>
+              <a:t>elif score &gt;= 60:</a:t>
+            </a:r>
+          </a:p>
+          <a:p>
+            <a:pPr>
+              <a:spcAft>
+                <a:spcPts val="600"/>
+              </a:spcAft>
+              <a:defRPr sz="1600">
+                <a:solidFill>
+                  <a:srgbClr val="333333"/>
+                </a:solidFill>
+              </a:defRPr>
+            </a:pPr>
+            <a:r>
+              <a:t>    grade = "D"</a:t>
+            </a:r>
+          </a:p>
+          <a:p>
+            <a:pPr>
+              <a:spcAft>
+                <a:spcPts val="600"/>
+              </a:spcAft>
+              <a:defRPr b="1" sz="2000">
+                <a:solidFill>
+                  <a:srgbClr val="333333"/>
+                </a:solidFill>
+              </a:defRPr>
+            </a:pPr>
+            <a:r>
+              <a:t>else:</a:t>
+            </a:r>
+          </a:p>
+          <a:p>
+            <a:pPr>
+              <a:spcAft>
+                <a:spcPts val="600"/>
+              </a:spcAft>
+              <a:defRPr sz="1600">
+                <a:solidFill>
+                  <a:srgbClr val="333333"/>
+                </a:solidFill>
+              </a:defRPr>
+            </a:pPr>
+            <a:r>
+              <a:t>    grade = "F"</a:t>
+            </a:r>
+          </a:p>
+          <a:p>
+            <a:pPr>
+              <a:spcAft>
+                <a:spcPts val="600"/>
+              </a:spcAft>
+              <a:defRPr b="1" sz="2000">
+                <a:solidFill>
+                  <a:srgbClr val="333333"/>
+                </a:solidFill>
+              </a:defRPr>
+            </a:pPr>
+            <a:r>
+              <a:t>Important: Order Matters</a:t>
+            </a:r>
+          </a:p>
+          <a:p>
+            <a:pPr lvl="1">
+              <a:spcAft>
+                <a:spcPts val="400"/>
+              </a:spcAft>
+              <a:defRPr sz="1600">
+                <a:solidFill>
+                  <a:srgbClr val="333333"/>
+                </a:solidFill>
+              </a:defRPr>
+            </a:pPr>
+            <a:r>
+              <a:t>• Checks conditions top to bottom</a:t>
+            </a:r>
+          </a:p>
+          <a:p>
+            <a:pPr lvl="1">
+              <a:spcAft>
+                <a:spcPts val="400"/>
+              </a:spcAft>
+              <a:defRPr sz="1600">
+                <a:solidFill>
+                  <a:srgbClr val="333333"/>
+                </a:solidFill>
+              </a:defRPr>
+            </a:pPr>
+            <a:r>
+              <a:t>• Stops at first True condition</a:t>
+            </a:r>
+          </a:p>
+          <a:p>
+            <a:pPr lvl="1">
+              <a:spcAft>
+                <a:spcPts val="400"/>
+              </a:spcAft>
+              <a:defRPr sz="1600">
+                <a:solidFill>
+                  <a:srgbClr val="333333"/>
+                </a:solidFill>
+              </a:defRPr>
+            </a:pPr>
+            <a:r>
+              <a:t>• Only one block executes</a:t>
+            </a:r>
+          </a:p>
+        </p:txBody>
+      </p:sp>
+    </p:spTree>
+  </p:cSld>
+  <p:clrMapOvr>
+    <a:masterClrMapping/>
+  </p:clrMapOvr>
+</p:sld>
+</file>
+
+<file path=ppt/slides/slide7.xml><?xml version="1.0" encoding="utf-8"?>
+<p:sld xmlns:a="http://schemas.openxmlformats.org/drawingml/2006/main" xmlns:p="http://schemas.openxmlformats.org/presentationml/2006/main" xmlns:r="http://schemas.openxmlformats.org/officeDocument/2006/relationships">
+  <p:cSld>
+    <p:spTree>
+      <p:nvGrpSpPr>
+        <p:cNvPr id="1" name=""/>
+        <p:cNvGrpSpPr/>
+        <p:nvPr/>
+      </p:nvGrpSpPr>
+      <p:grpSpPr/>
+      <p:sp>
+        <p:nvSpPr>
+          <p:cNvPr id="2" name="Rectangle 1"/>
+          <p:cNvSpPr/>
+          <p:nvPr/>
+        </p:nvSpPr>
+        <p:spPr>
+          <a:xfrm>
+            <a:off x="0" y="0"/>
+            <a:ext cx="12191695" cy="6858000"/>
+          </a:xfrm>
+          <a:prstGeom prst="rect">
+            <a:avLst/>
+          </a:prstGeom>
+          <a:solidFill>
+            <a:srgbClr val="FFFFFF"/>
+          </a:solidFill>
+          <a:ln>
+            <a:noFill/>
+          </a:ln>
+        </p:spPr>
+        <p:style>
+          <a:lnRef idx="1">
+            <a:schemeClr val="accent1"/>
+          </a:lnRef>
+          <a:fillRef idx="3">
+            <a:schemeClr val="accent1"/>
+          </a:fillRef>
+          <a:effectRef idx="2">
+            <a:schemeClr val="accent1"/>
+          </a:effectRef>
+          <a:fontRef idx="minor">
+            <a:schemeClr val="lt1"/>
+          </a:fontRef>
+        </p:style>
+        <p:txBody>
+          <a:bodyPr rtlCol="0" anchor="ctr"/>
+          <a:lstStyle/>
+          <a:p>
+            <a:pPr algn="ctr"/>
+          </a:p>
+        </p:txBody>
+      </p:sp>
+      <p:sp>
+        <p:nvSpPr>
+          <p:cNvPr id="3" name="Rectangle 2"/>
+          <p:cNvSpPr/>
+          <p:nvPr/>
+        </p:nvSpPr>
+        <p:spPr>
+          <a:xfrm>
+            <a:off x="0" y="0"/>
+            <a:ext cx="12191695" cy="137160"/>
+          </a:xfrm>
+          <a:prstGeom prst="rect">
+            <a:avLst/>
+          </a:prstGeom>
+          <a:solidFill>
+            <a:srgbClr val="0066CC"/>
+          </a:solidFill>
+          <a:ln>
+            <a:noFill/>
+          </a:ln>
+        </p:spPr>
+        <p:style>
+          <a:lnRef idx="1">
+            <a:schemeClr val="accent1"/>
+          </a:lnRef>
+          <a:fillRef idx="3">
+            <a:schemeClr val="accent1"/>
+          </a:fillRef>
+          <a:effectRef idx="2">
+            <a:schemeClr val="accent1"/>
+          </a:effectRef>
+          <a:fontRef idx="minor">
+            <a:schemeClr val="lt1"/>
+          </a:fontRef>
+        </p:style>
+        <p:txBody>
+          <a:bodyPr rtlCol="0" anchor="ctr"/>
+          <a:lstStyle/>
+          <a:p>
+            <a:pPr algn="ctr"/>
+          </a:p>
+        </p:txBody>
+      </p:sp>
+      <p:sp>
+        <p:nvSpPr>
+          <p:cNvPr id="4" name="TextBox 3"/>
+          <p:cNvSpPr txBox="1"/>
+          <p:nvPr/>
+        </p:nvSpPr>
+        <p:spPr>
+          <a:xfrm>
+            <a:off x="457200" y="320040"/>
+            <a:ext cx="10972800" cy="640080"/>
+          </a:xfrm>
+          <a:prstGeom prst="rect">
+            <a:avLst/>
+          </a:prstGeom>
+          <a:noFill/>
+        </p:spPr>
+        <p:txBody>
+          <a:bodyPr wrap="none">
+            <a:spAutoFit/>
+          </a:bodyPr>
+          <a:lstStyle/>
+          <a:p>
+            <a:pPr>
+              <a:defRPr sz="3600" b="1">
+                <a:solidFill>
+                  <a:srgbClr val="003366"/>
+                </a:solidFill>
+              </a:defRPr>
+            </a:pPr>
+            <a:r>
+              <a:t>Logical Operators: and</a:t>
+            </a:r>
+          </a:p>
+        </p:txBody>
+      </p:sp>
+      <p:sp>
+        <p:nvSpPr>
+          <p:cNvPr id="5" name="TextBox 4"/>
+          <p:cNvSpPr txBox="1"/>
+          <p:nvPr/>
+        </p:nvSpPr>
+        <p:spPr>
+          <a:xfrm>
+            <a:off x="640080" y="1188720"/>
+            <a:ext cx="10789920" cy="5303520"/>
+          </a:xfrm>
+          <a:prstGeom prst="rect">
+            <a:avLst/>
+          </a:prstGeom>
+          <a:noFill/>
+        </p:spPr>
+        <p:txBody>
+          <a:bodyPr wrap="square">
+            <a:spAutoFit/>
+          </a:bodyPr>
+          <a:lstStyle/>
+          <a:p>
+            <a:pPr>
+              <a:spcAft>
+                <a:spcPts val="600"/>
+              </a:spcAft>
+              <a:defRPr b="1" sz="2000">
+                <a:solidFill>
+                  <a:srgbClr val="333333"/>
+                </a:solidFill>
+              </a:defRPr>
+            </a:pPr>
+            <a:r>
+              <a:t>The and Operator:</a:t>
+            </a:r>
+          </a:p>
+          <a:p>
+            <a:pPr lvl="1">
+              <a:spcAft>
+                <a:spcPts val="400"/>
+              </a:spcAft>
+              <a:defRPr sz="1600">
+                <a:solidFill>
+                  <a:srgbClr val="333333"/>
+                </a:solidFill>
+              </a:defRPr>
+            </a:pPr>
+            <a:r>
+              <a:t>• Both conditions must be True</a:t>
+            </a:r>
+          </a:p>
+          <a:p>
+            <a:pPr lvl="1">
+              <a:spcAft>
+                <a:spcPts val="400"/>
+              </a:spcAft>
+              <a:defRPr sz="1600">
+                <a:solidFill>
+                  <a:srgbClr val="333333"/>
+                </a:solidFill>
+              </a:defRPr>
+            </a:pPr>
+            <a:r>
+              <a:t>• Result is True only if both are True</a:t>
+            </a:r>
+          </a:p>
+          <a:p>
+            <a:pPr>
+              <a:spcAft>
+                <a:spcPts val="600"/>
+              </a:spcAft>
+              <a:defRPr b="1" sz="2000">
+                <a:solidFill>
+                  <a:srgbClr val="333333"/>
+                </a:solidFill>
+              </a:defRPr>
+            </a:pPr>
+            <a:r>
+              <a:t>Syntax:</a:t>
+            </a:r>
+          </a:p>
+          <a:p>
+            <a:pPr>
+              <a:spcAft>
+                <a:spcPts val="600"/>
+              </a:spcAft>
+              <a:defRPr b="1" sz="2000">
+                <a:solidFill>
+                  <a:srgbClr val="333333"/>
+                </a:solidFill>
+              </a:defRPr>
+            </a:pPr>
+            <a:r>
+              <a:t>if condition1 and condition2:</a:t>
+            </a:r>
+          </a:p>
+          <a:p>
+            <a:pPr>
+              <a:spcAft>
+                <a:spcPts val="600"/>
+              </a:spcAft>
+              <a:defRPr sz="1600">
+                <a:solidFill>
+                  <a:srgbClr val="333333"/>
+                </a:solidFill>
+              </a:defRPr>
+            </a:pPr>
+            <a:r>
+              <a:t>    # code</a:t>
+            </a:r>
+          </a:p>
+          <a:p>
+            <a:pPr>
+              <a:spcAft>
+                <a:spcPts val="600"/>
+              </a:spcAft>
+              <a:defRPr b="1" sz="2000">
+                <a:solidFill>
+                  <a:srgbClr val="333333"/>
+                </a:solidFill>
+              </a:defRPr>
+            </a:pPr>
+            <a:r>
+              <a:t>Example:</a:t>
+            </a:r>
+          </a:p>
+          <a:p>
+            <a:pPr>
+              <a:spcAft>
+                <a:spcPts val="600"/>
+              </a:spcAft>
+              <a:defRPr sz="1600">
+                <a:solidFill>
+                  <a:srgbClr val="333333"/>
+                </a:solidFill>
+              </a:defRPr>
+            </a:pPr>
+            <a:r>
+              <a:t>age = 25</a:t>
+            </a:r>
+          </a:p>
+          <a:p>
+            <a:pPr>
+              <a:spcAft>
+                <a:spcPts val="600"/>
+              </a:spcAft>
+              <a:defRPr sz="1600">
+                <a:solidFill>
+                  <a:srgbClr val="333333"/>
+                </a:solidFill>
+              </a:defRPr>
+            </a:pPr>
+            <a:r>
+              <a:t>has_license = True</a:t>
+            </a:r>
+          </a:p>
+          <a:p>
+            <a:pPr>
+              <a:spcAft>
+                <a:spcPts val="600"/>
+              </a:spcAft>
+              <a:defRPr b="1" sz="2000">
+                <a:solidFill>
+                  <a:srgbClr val="333333"/>
+                </a:solidFill>
+              </a:defRPr>
+            </a:pPr>
+            <a:r>
+              <a:t>if age &gt;= 18 and has_license:</a:t>
+            </a:r>
+          </a:p>
+          <a:p>
+            <a:pPr>
+              <a:spcAft>
+                <a:spcPts val="600"/>
+              </a:spcAft>
+              <a:defRPr sz="1600">
+                <a:solidFill>
+                  <a:srgbClr val="333333"/>
+                </a:solidFill>
+              </a:defRPr>
+            </a:pPr>
+            <a:r>
+              <a:t>    print("Can drive")</a:t>
+            </a:r>
+          </a:p>
+          <a:p>
+            <a:pPr>
+              <a:spcAft>
+                <a:spcPts val="600"/>
+              </a:spcAft>
+              <a:defRPr b="1" sz="2000">
+                <a:solidFill>
+                  <a:srgbClr val="333333"/>
+                </a:solidFill>
+              </a:defRPr>
+            </a:pPr>
+            <a:r>
+              <a:t>Truth Table:</a:t>
+            </a:r>
+          </a:p>
+          <a:p>
+            <a:pPr>
+              <a:spcAft>
+                <a:spcPts val="600"/>
+              </a:spcAft>
+              <a:defRPr sz="1600">
+                <a:solidFill>
+                  <a:srgbClr val="333333"/>
+                </a:solidFill>
+              </a:defRPr>
+            </a:pPr>
+            <a:r>
+              <a:t>True and True   → True</a:t>
+            </a:r>
+          </a:p>
+          <a:p>
+            <a:pPr>
+              <a:spcAft>
+                <a:spcPts val="600"/>
+              </a:spcAft>
+              <a:defRPr sz="1600">
+                <a:solidFill>
+                  <a:srgbClr val="333333"/>
+                </a:solidFill>
+              </a:defRPr>
+            </a:pPr>
+            <a:r>
+              <a:t>True and False  → False</a:t>
+            </a:r>
+          </a:p>
+          <a:p>
+            <a:pPr>
+              <a:spcAft>
+                <a:spcPts val="600"/>
+              </a:spcAft>
+              <a:defRPr sz="1600">
+                <a:solidFill>
+                  <a:srgbClr val="333333"/>
+                </a:solidFill>
+              </a:defRPr>
+            </a:pPr>
+            <a:r>
+              <a:t>False and True  → False</a:t>
+            </a:r>
+          </a:p>
+          <a:p>
+            <a:pPr>
+              <a:spcAft>
+                <a:spcPts val="600"/>
+              </a:spcAft>
+              <a:defRPr sz="1600">
+                <a:solidFill>
+                  <a:srgbClr val="333333"/>
+                </a:solidFill>
+              </a:defRPr>
+            </a:pPr>
+            <a:r>
+              <a:t>False and False → False</a:t>
+            </a:r>
+          </a:p>
+          <a:p>
+            <a:pPr>
+              <a:spcAft>
+                <a:spcPts val="600"/>
+              </a:spcAft>
+              <a:defRPr b="1" sz="2000">
+                <a:solidFill>
+                  <a:srgbClr val="333333"/>
+                </a:solidFill>
+              </a:defRPr>
+            </a:pPr>
+            <a:r>
+              <a:t>Multiple Conditions:</a:t>
+            </a:r>
+          </a:p>
+          <a:p>
+            <a:pPr>
+              <a:spcAft>
+                <a:spcPts val="600"/>
+              </a:spcAft>
+              <a:defRPr b="1" sz="2000">
+                <a:solidFill>
+                  <a:srgbClr val="333333"/>
+                </a:solidFill>
+              </a:defRPr>
+            </a:pPr>
+            <a:r>
+              <a:t>if age &gt;= 18 and age &lt;= 65 and has_license:</a:t>
+            </a:r>
+          </a:p>
+          <a:p>
+            <a:pPr>
+              <a:spcAft>
+                <a:spcPts val="600"/>
+              </a:spcAft>
+              <a:defRPr sz="1600">
+                <a:solidFill>
+                  <a:srgbClr val="333333"/>
+                </a:solidFill>
+              </a:defRPr>
+            </a:pPr>
+            <a:r>
+              <a:t>    print("Standard driver")</a:t>
+            </a:r>
+          </a:p>
+          <a:p>
+            <a:pPr>
+              <a:spcAft>
+                <a:spcPts val="600"/>
+              </a:spcAft>
+              <a:defRPr b="1" sz="2000">
+                <a:solidFill>
+                  <a:srgbClr val="333333"/>
+                </a:solidFill>
+              </a:defRPr>
+            </a:pPr>
+            <a:r>
+              <a:t>Common Use Cases:</a:t>
+            </a:r>
+          </a:p>
+          <a:p>
+            <a:pPr lvl="1">
+              <a:spcAft>
+                <a:spcPts val="400"/>
+              </a:spcAft>
+              <a:defRPr sz="1600">
+                <a:solidFill>
+                  <a:srgbClr val="333333"/>
+                </a:solidFill>
+              </a:defRPr>
+            </a:pPr>
+            <a:r>
+              <a:t>• Range checks</a:t>
+            </a:r>
+          </a:p>
+          <a:p>
+            <a:pPr lvl="1">
+              <a:spcAft>
+                <a:spcPts val="400"/>
+              </a:spcAft>
+              <a:defRPr sz="1600">
+                <a:solidFill>
+                  <a:srgbClr val="333333"/>
+                </a:solidFill>
+              </a:defRPr>
+            </a:pPr>
+            <a:r>
+              <a:t>• Multiple requirements</a:t>
+            </a:r>
+          </a:p>
+          <a:p>
+            <a:pPr lvl="1">
+              <a:spcAft>
+                <a:spcPts val="400"/>
+              </a:spcAft>
+              <a:defRPr sz="1600">
+                <a:solidFill>
+                  <a:srgbClr val="333333"/>
+                </a:solidFill>
+              </a:defRPr>
+            </a:pPr>
+            <a:r>
+              <a:t>• Validation checks</a:t>
+            </a:r>
+          </a:p>
+        </p:txBody>
+      </p:sp>
+    </p:spTree>
+  </p:cSld>
+  <p:clrMapOvr>
+    <a:masterClrMapping/>
+  </p:clrMapOvr>
+</p:sld>
+</file>
+
+<file path=ppt/slides/slide8.xml><?xml version="1.0" encoding="utf-8"?>
+<p:sld xmlns:a="http://schemas.openxmlformats.org/drawingml/2006/main" xmlns:p="http://schemas.openxmlformats.org/presentationml/2006/main" xmlns:r="http://schemas.openxmlformats.org/officeDocument/2006/relationships">
+  <p:cSld>
+    <p:spTree>
+      <p:nvGrpSpPr>
+        <p:cNvPr id="1" name=""/>
+        <p:cNvGrpSpPr/>
+        <p:nvPr/>
+      </p:nvGrpSpPr>
+      <p:grpSpPr/>
+      <p:sp>
+        <p:nvSpPr>
+          <p:cNvPr id="2" name="Rectangle 1"/>
+          <p:cNvSpPr/>
+          <p:nvPr/>
+        </p:nvSpPr>
+        <p:spPr>
+          <a:xfrm>
+            <a:off x="0" y="0"/>
+            <a:ext cx="12191695" cy="6858000"/>
+          </a:xfrm>
+          <a:prstGeom prst="rect">
+            <a:avLst/>
+          </a:prstGeom>
+          <a:solidFill>
+            <a:srgbClr val="FFFFFF"/>
+          </a:solidFill>
+          <a:ln>
+            <a:noFill/>
+          </a:ln>
+        </p:spPr>
+        <p:style>
+          <a:lnRef idx="1">
+            <a:schemeClr val="accent1"/>
+          </a:lnRef>
+          <a:fillRef idx="3">
+            <a:schemeClr val="accent1"/>
+          </a:fillRef>
+          <a:effectRef idx="2">
+            <a:schemeClr val="accent1"/>
+          </a:effectRef>
+          <a:fontRef idx="minor">
+            <a:schemeClr val="lt1"/>
+          </a:fontRef>
+        </p:style>
+        <p:txBody>
+          <a:bodyPr rtlCol="0" anchor="ctr"/>
+          <a:lstStyle/>
+          <a:p>
+            <a:pPr algn="ctr"/>
+          </a:p>
+        </p:txBody>
+      </p:sp>
+      <p:sp>
+        <p:nvSpPr>
+          <p:cNvPr id="3" name="Rectangle 2"/>
+          <p:cNvSpPr/>
+          <p:nvPr/>
+        </p:nvSpPr>
+        <p:spPr>
+          <a:xfrm>
+            <a:off x="0" y="0"/>
+            <a:ext cx="12191695" cy="137160"/>
+          </a:xfrm>
+          <a:prstGeom prst="rect">
+            <a:avLst/>
+          </a:prstGeom>
+          <a:solidFill>
+            <a:srgbClr val="0066CC"/>
+          </a:solidFill>
+          <a:ln>
+            <a:noFill/>
+          </a:ln>
+        </p:spPr>
+        <p:style>
+          <a:lnRef idx="1">
+            <a:schemeClr val="accent1"/>
+          </a:lnRef>
+          <a:fillRef idx="3">
+            <a:schemeClr val="accent1"/>
+          </a:fillRef>
+          <a:effectRef idx="2">
+            <a:schemeClr val="accent1"/>
+          </a:effectRef>
+          <a:fontRef idx="minor">
+            <a:schemeClr val="lt1"/>
+          </a:fontRef>
+        </p:style>
+        <p:txBody>
+          <a:bodyPr rtlCol="0" anchor="ctr"/>
+          <a:lstStyle/>
+          <a:p>
+            <a:pPr algn="ctr"/>
+          </a:p>
+        </p:txBody>
+      </p:sp>
+      <p:sp>
+        <p:nvSpPr>
+          <p:cNvPr id="4" name="TextBox 3"/>
+          <p:cNvSpPr txBox="1"/>
+          <p:nvPr/>
+        </p:nvSpPr>
+        <p:spPr>
+          <a:xfrm>
+            <a:off x="457200" y="320040"/>
+            <a:ext cx="10972800" cy="640080"/>
+          </a:xfrm>
+          <a:prstGeom prst="rect">
+            <a:avLst/>
+          </a:prstGeom>
+          <a:noFill/>
+        </p:spPr>
+        <p:txBody>
+          <a:bodyPr wrap="none">
+            <a:spAutoFit/>
+          </a:bodyPr>
+          <a:lstStyle/>
+          <a:p>
+            <a:pPr>
+              <a:defRPr sz="3600" b="1">
+                <a:solidFill>
+                  <a:srgbClr val="003366"/>
+                </a:solidFill>
+              </a:defRPr>
+            </a:pPr>
+            <a:r>
+              <a:t>Logical Operators: or</a:t>
+            </a:r>
+          </a:p>
+        </p:txBody>
+      </p:sp>
+      <p:sp>
+        <p:nvSpPr>
+          <p:cNvPr id="5" name="TextBox 4"/>
+          <p:cNvSpPr txBox="1"/>
+          <p:nvPr/>
+        </p:nvSpPr>
+        <p:spPr>
+          <a:xfrm>
+            <a:off x="640080" y="1188720"/>
+            <a:ext cx="10789920" cy="5303520"/>
+          </a:xfrm>
+          <a:prstGeom prst="rect">
+            <a:avLst/>
+          </a:prstGeom>
+          <a:noFill/>
+        </p:spPr>
+        <p:txBody>
+          <a:bodyPr wrap="square">
+            <a:spAutoFit/>
+          </a:bodyPr>
+          <a:lstStyle/>
+          <a:p>
+            <a:pPr>
+              <a:spcAft>
+                <a:spcPts val="600"/>
+              </a:spcAft>
+              <a:defRPr b="1" sz="2000">
+                <a:solidFill>
+                  <a:srgbClr val="333333"/>
+                </a:solidFill>
+              </a:defRPr>
+            </a:pPr>
+            <a:r>
+              <a:t>The or Operator:</a:t>
+            </a:r>
+          </a:p>
+          <a:p>
+            <a:pPr lvl="1">
+              <a:spcAft>
+                <a:spcPts val="400"/>
+              </a:spcAft>
+              <a:defRPr sz="1600">
+                <a:solidFill>
+                  <a:srgbClr val="333333"/>
+                </a:solidFill>
+              </a:defRPr>
+            </a:pPr>
+            <a:r>
+              <a:t>• At least one condition must be True</a:t>
+            </a:r>
+          </a:p>
+          <a:p>
+            <a:pPr lvl="1">
+              <a:spcAft>
+                <a:spcPts val="400"/>
+              </a:spcAft>
+              <a:defRPr sz="1600">
+                <a:solidFill>
+                  <a:srgbClr val="333333"/>
+                </a:solidFill>
+              </a:defRPr>
+            </a:pPr>
+            <a:r>
+              <a:t>• Result is True if any is True</a:t>
+            </a:r>
+          </a:p>
+          <a:p>
+            <a:pPr>
+              <a:spcAft>
+                <a:spcPts val="600"/>
+              </a:spcAft>
+              <a:defRPr b="1" sz="2000">
+                <a:solidFill>
+                  <a:srgbClr val="333333"/>
+                </a:solidFill>
+              </a:defRPr>
+            </a:pPr>
+            <a:r>
+              <a:t>Syntax:</a:t>
+            </a:r>
+          </a:p>
+          <a:p>
+            <a:pPr>
+              <a:spcAft>
+                <a:spcPts val="600"/>
+              </a:spcAft>
+              <a:defRPr b="1" sz="2000">
+                <a:solidFill>
+                  <a:srgbClr val="333333"/>
+                </a:solidFill>
+              </a:defRPr>
+            </a:pPr>
+            <a:r>
+              <a:t>if condition1 or condition2:</a:t>
+            </a:r>
+          </a:p>
+          <a:p>
+            <a:pPr>
+              <a:spcAft>
+                <a:spcPts val="600"/>
+              </a:spcAft>
+              <a:defRPr sz="1600">
+                <a:solidFill>
+                  <a:srgbClr val="333333"/>
+                </a:solidFill>
+              </a:defRPr>
+            </a:pPr>
+            <a:r>
+              <a:t>    # code</a:t>
+            </a:r>
+          </a:p>
+          <a:p>
+            <a:pPr>
+              <a:spcAft>
+                <a:spcPts val="600"/>
+              </a:spcAft>
+              <a:defRPr b="1" sz="2000">
+                <a:solidFill>
+                  <a:srgbClr val="333333"/>
+                </a:solidFill>
+              </a:defRPr>
+            </a:pPr>
+            <a:r>
+              <a:t>Example:</a:t>
+            </a:r>
+          </a:p>
+          <a:p>
+            <a:pPr>
+              <a:spcAft>
+                <a:spcPts val="600"/>
+              </a:spcAft>
+              <a:defRPr sz="1600">
+                <a:solidFill>
+                  <a:srgbClr val="333333"/>
+                </a:solidFill>
+              </a:defRPr>
+            </a:pPr>
+            <a:r>
+              <a:t>age = 10</a:t>
+            </a:r>
+          </a:p>
+          <a:p>
+            <a:pPr>
+              <a:spcAft>
+                <a:spcPts val="600"/>
+              </a:spcAft>
+              <a:defRPr b="1" sz="2000">
+                <a:solidFill>
+                  <a:srgbClr val="333333"/>
+                </a:solidFill>
+              </a:defRPr>
+            </a:pPr>
+            <a:r>
+              <a:t>if age &lt; 12 or age &gt; 65:</a:t>
+            </a:r>
+          </a:p>
+          <a:p>
+            <a:pPr>
+              <a:spcAft>
+                <a:spcPts val="600"/>
+              </a:spcAft>
+              <a:defRPr sz="1600">
+                <a:solidFill>
+                  <a:srgbClr val="333333"/>
+                </a:solidFill>
+              </a:defRPr>
+            </a:pPr>
+            <a:r>
+              <a:t>    print("Discounted ticket")</a:t>
+            </a:r>
+          </a:p>
+          <a:p>
+            <a:pPr>
+              <a:spcAft>
+                <a:spcPts val="600"/>
+              </a:spcAft>
+              <a:defRPr b="1" sz="2000">
+                <a:solidFill>
+                  <a:srgbClr val="333333"/>
+                </a:solidFill>
+              </a:defRPr>
+            </a:pPr>
+            <a:r>
+              <a:t>Truth Table:</a:t>
+            </a:r>
+          </a:p>
+          <a:p>
+            <a:pPr>
+              <a:spcAft>
+                <a:spcPts val="600"/>
+              </a:spcAft>
+              <a:defRPr sz="1600">
+                <a:solidFill>
+                  <a:srgbClr val="333333"/>
+                </a:solidFill>
+              </a:defRPr>
+            </a:pPr>
+            <a:r>
+              <a:t>True or True   → True</a:t>
+            </a:r>
+          </a:p>
+          <a:p>
+            <a:pPr>
+              <a:spcAft>
+                <a:spcPts val="600"/>
+              </a:spcAft>
+              <a:defRPr sz="1600">
+                <a:solidFill>
+                  <a:srgbClr val="333333"/>
+                </a:solidFill>
+              </a:defRPr>
+            </a:pPr>
+            <a:r>
+              <a:t>True or False  → True</a:t>
+            </a:r>
+          </a:p>
+          <a:p>
+            <a:pPr>
+              <a:spcAft>
+                <a:spcPts val="600"/>
+              </a:spcAft>
+              <a:defRPr sz="1600">
+                <a:solidFill>
+                  <a:srgbClr val="333333"/>
+                </a:solidFill>
+              </a:defRPr>
+            </a:pPr>
+            <a:r>
+              <a:t>False or True  → True</a:t>
+            </a:r>
+          </a:p>
+          <a:p>
+            <a:pPr>
+              <a:spcAft>
+                <a:spcPts val="600"/>
+              </a:spcAft>
+              <a:defRPr sz="1600">
+                <a:solidFill>
+                  <a:srgbClr val="333333"/>
+                </a:solidFill>
+              </a:defRPr>
+            </a:pPr>
+            <a:r>
+              <a:t>False or False → False</a:t>
+            </a:r>
+          </a:p>
+          <a:p>
+            <a:pPr>
+              <a:spcAft>
+                <a:spcPts val="600"/>
+              </a:spcAft>
+              <a:defRPr b="1" sz="2000">
+                <a:solidFill>
+                  <a:srgbClr val="333333"/>
+                </a:solidFill>
+              </a:defRPr>
+            </a:pPr>
+            <a:r>
+              <a:t>Practical Example:</a:t>
+            </a:r>
+          </a:p>
+          <a:p>
+            <a:pPr>
+              <a:spcAft>
+                <a:spcPts val="600"/>
+              </a:spcAft>
+              <a:defRPr sz="1600">
+                <a:solidFill>
+                  <a:srgbClr val="333333"/>
+                </a:solidFill>
+              </a:defRPr>
+            </a:pPr>
+            <a:r>
+              <a:t>day = "Saturday"</a:t>
+            </a:r>
+          </a:p>
+          <a:p>
+            <a:pPr>
+              <a:spcAft>
+                <a:spcPts val="600"/>
+              </a:spcAft>
+              <a:defRPr b="1" sz="2000">
+                <a:solidFill>
+                  <a:srgbClr val="333333"/>
+                </a:solidFill>
+              </a:defRPr>
+            </a:pPr>
+            <a:r>
+              <a:t>if day == "Saturday" or day == "Sunday":</a:t>
+            </a:r>
+          </a:p>
+          <a:p>
+            <a:pPr>
+              <a:spcAft>
+                <a:spcPts val="600"/>
+              </a:spcAft>
+              <a:defRPr sz="1600">
+                <a:solidFill>
+                  <a:srgbClr val="333333"/>
+                </a:solidFill>
+              </a:defRPr>
+            </a:pPr>
+            <a:r>
+              <a:t>    print("Weekend!")</a:t>
+            </a:r>
+          </a:p>
+          <a:p>
+            <a:pPr>
+              <a:spcAft>
+                <a:spcPts val="600"/>
+              </a:spcAft>
+              <a:defRPr b="1" sz="2000">
+                <a:solidFill>
+                  <a:srgbClr val="333333"/>
+                </a:solidFill>
+              </a:defRPr>
+            </a:pPr>
+            <a:r>
+              <a:t>Common Use Cases:</a:t>
+            </a:r>
+          </a:p>
+          <a:p>
+            <a:pPr lvl="1">
+              <a:spcAft>
+                <a:spcPts val="400"/>
+              </a:spcAft>
+              <a:defRPr sz="1600">
+                <a:solidFill>
+                  <a:srgbClr val="333333"/>
+                </a:solidFill>
+              </a:defRPr>
+            </a:pPr>
+            <a:r>
+              <a:t>• Alternative conditions</a:t>
+            </a:r>
+          </a:p>
+          <a:p>
+            <a:pPr lvl="1">
+              <a:spcAft>
+                <a:spcPts val="400"/>
+              </a:spcAft>
+              <a:defRPr sz="1600">
+                <a:solidFill>
+                  <a:srgbClr val="333333"/>
+                </a:solidFill>
+              </a:defRPr>
+            </a:pPr>
+            <a:r>
+              <a:t>• Multiple valid options</a:t>
+            </a:r>
+          </a:p>
+          <a:p>
+            <a:pPr lvl="1">
+              <a:spcAft>
+                <a:spcPts val="400"/>
+              </a:spcAft>
+              <a:defRPr sz="1600">
+                <a:solidFill>
+                  <a:srgbClr val="333333"/>
+                </a:solidFill>
+              </a:defRPr>
+            </a:pPr>
+            <a:r>
+              <a:t>• Fallback conditions</a:t>
+            </a:r>
+          </a:p>
+        </p:txBody>
+      </p:sp>
+    </p:spTree>
+  </p:cSld>
+  <p:clrMapOvr>
+    <a:masterClrMapping/>
+  </p:clrMapOvr>
+</p:sld>
+</file>
+
+<file path=ppt/slides/slide9.xml><?xml version="1.0" encoding="utf-8"?>
+<p:sld xmlns:a="http://schemas.openxmlformats.org/drawingml/2006/main" xmlns:p="http://schemas.openxmlformats.org/presentationml/2006/main" xmlns:r="http://schemas.openxmlformats.org/officeDocument/2006/relationships">
+  <p:cSld>
+    <p:spTree>
+      <p:nvGrpSpPr>
+        <p:cNvPr id="1" name=""/>
+        <p:cNvGrpSpPr/>
+        <p:nvPr/>
+      </p:nvGrpSpPr>
+      <p:grpSpPr/>
+      <p:sp>
+        <p:nvSpPr>
+          <p:cNvPr id="2" name="Rectangle 1"/>
+          <p:cNvSpPr/>
+          <p:nvPr/>
+        </p:nvSpPr>
+        <p:spPr>
+          <a:xfrm>
+            <a:off x="0" y="0"/>
+            <a:ext cx="12191695" cy="6858000"/>
+          </a:xfrm>
+          <a:prstGeom prst="rect">
+            <a:avLst/>
+          </a:prstGeom>
+          <a:solidFill>
+            <a:srgbClr val="FFFFFF"/>
+          </a:solidFill>
+          <a:ln>
+            <a:noFill/>
+          </a:ln>
+        </p:spPr>
+        <p:style>
+          <a:lnRef idx="1">
+            <a:schemeClr val="accent1"/>
+          </a:lnRef>
+          <a:fillRef idx="3">
+            <a:schemeClr val="accent1"/>
+          </a:fillRef>
+          <a:effectRef idx="2">
+            <a:schemeClr val="accent1"/>
+          </a:effectRef>
+          <a:fontRef idx="minor">
+            <a:schemeClr val="lt1"/>
+          </a:fontRef>
+        </p:style>
+        <p:txBody>
+          <a:bodyPr rtlCol="0" anchor="ctr"/>
+          <a:lstStyle/>
+          <a:p>
+            <a:pPr algn="ctr"/>
+          </a:p>
+        </p:txBody>
+      </p:sp>
+      <p:sp>
+        <p:nvSpPr>
+          <p:cNvPr id="3" name="Rectangle 2"/>
+          <p:cNvSpPr/>
+          <p:nvPr/>
+        </p:nvSpPr>
+        <p:spPr>
+          <a:xfrm>
+            <a:off x="0" y="0"/>
+            <a:ext cx="12191695" cy="137160"/>
+          </a:xfrm>
+          <a:prstGeom prst="rect">
+            <a:avLst/>
+          </a:prstGeom>
+          <a:solidFill>
+            <a:srgbClr val="0066CC"/>
+          </a:solidFill>
+          <a:ln>
+            <a:noFill/>
+          </a:ln>
+        </p:spPr>
+        <p:style>
+          <a:lnRef idx="1">
+            <a:schemeClr val="accent1"/>
+          </a:lnRef>
+          <a:fillRef idx="3">
+            <a:schemeClr val="accent1"/>
+          </a:fillRef>
+          <a:effectRef idx="2">
+            <a:schemeClr val="accent1"/>
+          </a:effectRef>
+          <a:fontRef idx="minor">
+            <a:schemeClr val="lt1"/>
+          </a:fontRef>
+        </p:style>
+        <p:txBody>
+          <a:bodyPr rtlCol="0" anchor="ctr"/>
+          <a:lstStyle/>
+          <a:p>
+            <a:pPr algn="ctr"/>
+          </a:p>
+        </p:txBody>
+      </p:sp>
+      <p:sp>
+        <p:nvSpPr>
+          <p:cNvPr id="4" name="TextBox 3"/>
+          <p:cNvSpPr txBox="1"/>
+          <p:nvPr/>
+        </p:nvSpPr>
+        <p:spPr>
+          <a:xfrm>
+            <a:off x="457200" y="320040"/>
+            <a:ext cx="10972800" cy="640080"/>
+          </a:xfrm>
+          <a:prstGeom prst="rect">
+            <a:avLst/>
+          </a:prstGeom>
+          <a:noFill/>
+        </p:spPr>
+        <p:txBody>
+          <a:bodyPr wrap="none">
+            <a:spAutoFit/>
+          </a:bodyPr>
+          <a:lstStyle/>
+          <a:p>
+            <a:pPr>
+              <a:defRPr sz="3600" b="1">
+                <a:solidFill>
+                  <a:srgbClr val="003366"/>
+                </a:solidFill>
+              </a:defRPr>
+            </a:pPr>
+            <a:r>
+              <a:t>Logical Operators: not</a:t>
+            </a:r>
+          </a:p>
+        </p:txBody>
+      </p:sp>
+      <p:sp>
+        <p:nvSpPr>
+          <p:cNvPr id="5" name="TextBox 4"/>
+          <p:cNvSpPr txBox="1"/>
+          <p:nvPr/>
+        </p:nvSpPr>
+        <p:spPr>
+          <a:xfrm>
+            <a:off x="640080" y="1188720"/>
+            <a:ext cx="10789920" cy="5303520"/>
+          </a:xfrm>
+          <a:prstGeom prst="rect">
+            <a:avLst/>
+          </a:prstGeom>
+          <a:noFill/>
+        </p:spPr>
+        <p:txBody>
+          <a:bodyPr wrap="square">
+            <a:spAutoFit/>
+          </a:bodyPr>
+          <a:lstStyle/>
+          <a:p>
+            <a:pPr>
+              <a:spcAft>
+                <a:spcPts val="600"/>
+              </a:spcAft>
+              <a:defRPr b="1" sz="2000">
+                <a:solidFill>
+                  <a:srgbClr val="333333"/>
+                </a:solidFill>
+              </a:defRPr>
+            </a:pPr>
+            <a:r>
+              <a:t>The not Operator:</a:t>
+            </a:r>
+          </a:p>
+          <a:p>
+            <a:pPr lvl="1">
+              <a:spcAft>
+                <a:spcPts val="400"/>
+              </a:spcAft>
+              <a:defRPr sz="1600">
+                <a:solidFill>
+                  <a:srgbClr val="333333"/>
+                </a:solidFill>
+              </a:defRPr>
+            </a:pPr>
+            <a:r>
+              <a:t>• Reverses boolean value</a:t>
+            </a:r>
+          </a:p>
+          <a:p>
+            <a:pPr lvl="1">
+              <a:spcAft>
+                <a:spcPts val="400"/>
+              </a:spcAft>
+              <a:defRPr sz="1600">
+                <a:solidFill>
+                  <a:srgbClr val="333333"/>
+                </a:solidFill>
+              </a:defRPr>
+            </a:pPr>
+            <a:r>
+              <a:t>• True becomes False</a:t>
+            </a:r>
+          </a:p>
+          <a:p>
+            <a:pPr lvl="1">
+              <a:spcAft>
+                <a:spcPts val="400"/>
+              </a:spcAft>
+              <a:defRPr sz="1600">
+                <a:solidFill>
+                  <a:srgbClr val="333333"/>
+                </a:solidFill>
+              </a:defRPr>
+            </a:pPr>
+            <a:r>
+              <a:t>• False becomes True</a:t>
+            </a:r>
+          </a:p>
+          <a:p>
+            <a:pPr>
+              <a:spcAft>
+                <a:spcPts val="600"/>
+              </a:spcAft>
+              <a:defRPr b="1" sz="2000">
+                <a:solidFill>
+                  <a:srgbClr val="333333"/>
+                </a:solidFill>
+              </a:defRPr>
+            </a:pPr>
+            <a:r>
+              <a:t>Syntax:</a:t>
+            </a:r>
+          </a:p>
+          <a:p>
+            <a:pPr>
+              <a:spcAft>
+                <a:spcPts val="600"/>
+              </a:spcAft>
+              <a:defRPr b="1" sz="2000">
+                <a:solidFill>
+                  <a:srgbClr val="333333"/>
+                </a:solidFill>
+              </a:defRPr>
+            </a:pPr>
+            <a:r>
+              <a:t>if not condition:</a:t>
+            </a:r>
+          </a:p>
+          <a:p>
+            <a:pPr>
+              <a:spcAft>
+                <a:spcPts val="600"/>
+              </a:spcAft>
+              <a:defRPr sz="1600">
+                <a:solidFill>
+                  <a:srgbClr val="333333"/>
+                </a:solidFill>
+              </a:defRPr>
+            </a:pPr>
+            <a:r>
+              <a:t>    # code</a:t>
+            </a:r>
+          </a:p>
+          <a:p>
+            <a:pPr>
+              <a:spcAft>
+                <a:spcPts val="600"/>
+              </a:spcAft>
+              <a:defRPr b="1" sz="2000">
+                <a:solidFill>
+                  <a:srgbClr val="333333"/>
+                </a:solidFill>
+              </a:defRPr>
+            </a:pPr>
+            <a:r>
+              <a:t>Example:</a:t>
+            </a:r>
+          </a:p>
+          <a:p>
+            <a:pPr>
+              <a:spcAft>
+                <a:spcPts val="600"/>
+              </a:spcAft>
+              <a:defRPr sz="1600">
+                <a:solidFill>
+                  <a:srgbClr val="333333"/>
+                </a:solidFill>
+              </a:defRPr>
+            </a:pPr>
+            <a:r>
+              <a:t>is_raining = False</a:t>
+            </a:r>
+          </a:p>
+          <a:p>
+            <a:pPr>
+              <a:spcAft>
+                <a:spcPts val="600"/>
+              </a:spcAft>
+              <a:defRPr b="1" sz="2000">
+                <a:solidFill>
+                  <a:srgbClr val="333333"/>
+                </a:solidFill>
+              </a:defRPr>
+            </a:pPr>
+            <a:r>
+              <a:t>if not is_raining:</a:t>
+            </a:r>
+          </a:p>
+          <a:p>
+            <a:pPr>
+              <a:spcAft>
+                <a:spcPts val="600"/>
+              </a:spcAft>
+              <a:defRPr sz="1600">
+                <a:solidFill>
+                  <a:srgbClr val="333333"/>
+                </a:solidFill>
+              </a:defRPr>
+            </a:pPr>
+            <a:r>
+              <a:t>    print("Go outside")</a:t>
+            </a:r>
+          </a:p>
+          <a:p>
+            <a:pPr>
+              <a:spcAft>
+                <a:spcPts val="600"/>
+              </a:spcAft>
+              <a:defRPr b="1" sz="2000">
+                <a:solidFill>
+                  <a:srgbClr val="333333"/>
+                </a:solidFill>
+              </a:defRPr>
+            </a:pPr>
+            <a:r>
+              <a:t>Truth Table:</a:t>
+            </a:r>
+          </a:p>
+          <a:p>
+            <a:pPr>
+              <a:spcAft>
+                <a:spcPts val="600"/>
+              </a:spcAft>
+              <a:defRPr sz="1600">
+                <a:solidFill>
+                  <a:srgbClr val="333333"/>
+                </a:solidFill>
+              </a:defRPr>
+            </a:pPr>
+            <a:r>
+              <a:t>not True  → False</a:t>
+            </a:r>
+          </a:p>
+          <a:p>
+            <a:pPr>
+              <a:spcAft>
+                <a:spcPts val="600"/>
+              </a:spcAft>
+              <a:defRPr sz="1600">
+                <a:solidFill>
+                  <a:srgbClr val="333333"/>
+                </a:solidFill>
+              </a:defRPr>
+            </a:pPr>
+            <a:r>
+              <a:t>not False → True</a:t>
+            </a:r>
+          </a:p>
+          <a:p>
+            <a:pPr>
+              <a:spcAft>
+                <a:spcPts val="600"/>
+              </a:spcAft>
+              <a:defRPr b="1" sz="2000">
+                <a:solidFill>
+                  <a:srgbClr val="333333"/>
+                </a:solidFill>
+              </a:defRPr>
+            </a:pPr>
+            <a:r>
+              <a:t>With Comparisons:</a:t>
+            </a:r>
+          </a:p>
+          <a:p>
+            <a:pPr>
+              <a:spcAft>
+                <a:spcPts val="600"/>
+              </a:spcAft>
+              <a:defRPr b="1" sz="2000">
+                <a:solidFill>
+                  <a:srgbClr val="333333"/>
+                </a:solidFill>
+              </a:defRPr>
+            </a:pPr>
+            <a:r>
+              <a:t>if not (age &gt;= 18):</a:t>
+            </a:r>
+          </a:p>
+          <a:p>
+            <a:pPr>
+              <a:spcAft>
+                <a:spcPts val="600"/>
+              </a:spcAft>
+              <a:defRPr sz="1600">
+                <a:solidFill>
+                  <a:srgbClr val="333333"/>
+                </a:solidFill>
+              </a:defRPr>
+            </a:pPr>
+            <a:r>
+              <a:t>    print("Minor")</a:t>
+            </a:r>
+          </a:p>
+          <a:p>
+            <a:pPr>
+              <a:spcAft>
+                <a:spcPts val="600"/>
+              </a:spcAft>
+              <a:defRPr b="1" sz="2000">
+                <a:solidFill>
+                  <a:srgbClr val="333333"/>
+                </a:solidFill>
+              </a:defRPr>
+            </a:pPr>
+            <a:r>
+              <a:t>Equivalent to:</a:t>
+            </a:r>
+          </a:p>
+          <a:p>
+            <a:pPr>
+              <a:spcAft>
+                <a:spcPts val="600"/>
+              </a:spcAft>
+              <a:defRPr b="1" sz="2000">
+                <a:solidFill>
+                  <a:srgbClr val="333333"/>
+                </a:solidFill>
+              </a:defRPr>
+            </a:pPr>
+            <a:r>
+              <a:t>if age &lt; 18:</a:t>
+            </a:r>
+          </a:p>
+          <a:p>
+            <a:pPr>
+              <a:spcAft>
+                <a:spcPts val="600"/>
+              </a:spcAft>
+              <a:defRPr sz="1600">
+                <a:solidFill>
+                  <a:srgbClr val="333333"/>
+                </a:solidFill>
+              </a:defRPr>
+            </a:pPr>
+            <a:r>
+              <a:t>    print("Minor")</a:t>
+            </a:r>
+          </a:p>
+          <a:p>
+            <a:pPr>
+              <a:spcAft>
+                <a:spcPts val="600"/>
+              </a:spcAft>
+              <a:defRPr b="1" sz="2000">
+                <a:solidFill>
+                  <a:srgbClr val="333333"/>
+                </a:solidFill>
+              </a:defRPr>
+            </a:pPr>
+            <a:r>
+              <a:t>Common Pattern:</a:t>
+            </a:r>
+          </a:p>
+          <a:p>
+            <a:pPr>
+              <a:spcAft>
+                <a:spcPts val="600"/>
+              </a:spcAft>
+              <a:defRPr b="1" sz="2000">
+                <a:solidFill>
+                  <a:srgbClr val="333333"/>
+                </a:solidFill>
+              </a:defRPr>
+            </a:pPr>
+            <a:r>
+              <a:t>if not username:</a:t>
+            </a:r>
+          </a:p>
+          <a:p>
+            <a:pPr>
+              <a:spcAft>
+                <a:spcPts val="600"/>
+              </a:spcAft>
+              <a:defRPr sz="1600">
+                <a:solidFill>
+                  <a:srgbClr val="333333"/>
+                </a:solidFill>
+              </a:defRPr>
+            </a:pPr>
+            <a:r>
+              <a:t>    print("Username required")</a:t>
             </a:r>
           </a:p>
         </p:txBody>
